--- a/WorldWithWeb_Demo_Session.pptx
+++ b/WorldWithWeb_Demo_Session.pptx
@@ -4,27 +4,30 @@
   <p:sldMasterIdLst>
     <p:sldMasterId id="2147483648" r:id="rId1"/>
   </p:sldMasterIdLst>
+  <p:notesMasterIdLst>
+    <p:notesMasterId r:id="rId20"/>
+  </p:notesMasterIdLst>
   <p:sldIdLst>
-    <p:sldId id="256" r:id="rId7"/>
-    <p:sldId id="257" r:id="rId8"/>
-    <p:sldId id="258" r:id="rId9"/>
-    <p:sldId id="259" r:id="rId10"/>
-    <p:sldId id="260" r:id="rId11"/>
-    <p:sldId id="261" r:id="rId12"/>
-    <p:sldId id="262" r:id="rId13"/>
-    <p:sldId id="263" r:id="rId14"/>
-    <p:sldId id="264" r:id="rId15"/>
-    <p:sldId id="265" r:id="rId16"/>
-    <p:sldId id="266" r:id="rId17"/>
-    <p:sldId id="267" r:id="rId18"/>
-    <p:sldId id="268" r:id="rId19"/>
-    <p:sldId id="269" r:id="rId20"/>
-    <p:sldId id="270" r:id="rId21"/>
-    <p:sldId id="271" r:id="rId22"/>
-    <p:sldId id="272" r:id="rId23"/>
-    <p:sldId id="273" r:id="rId24"/>
+    <p:sldId id="256" r:id="rId2"/>
+    <p:sldId id="257" r:id="rId3"/>
+    <p:sldId id="258" r:id="rId4"/>
+    <p:sldId id="259" r:id="rId5"/>
+    <p:sldId id="260" r:id="rId6"/>
+    <p:sldId id="261" r:id="rId7"/>
+    <p:sldId id="262" r:id="rId8"/>
+    <p:sldId id="263" r:id="rId9"/>
+    <p:sldId id="264" r:id="rId10"/>
+    <p:sldId id="265" r:id="rId11"/>
+    <p:sldId id="266" r:id="rId12"/>
+    <p:sldId id="267" r:id="rId13"/>
+    <p:sldId id="268" r:id="rId14"/>
+    <p:sldId id="269" r:id="rId15"/>
+    <p:sldId id="270" r:id="rId16"/>
+    <p:sldId id="271" r:id="rId17"/>
+    <p:sldId id="272" r:id="rId18"/>
+    <p:sldId id="273" r:id="rId19"/>
   </p:sldIdLst>
-  <p:sldSz cx="12191695" cy="6858000" type="screen4x3"/>
+  <p:sldSz cx="12192000" cy="6858000"/>
   <p:notesSz cx="6858000" cy="9144000"/>
   <p:defaultTextStyle>
     <a:defPPr>
@@ -121,7 +124,548 @@
       </a:defRPr>
     </a:lvl9pPr>
   </p:defaultTextStyle>
+  <p:extLst>
+    <p:ext uri="{EFAFB233-063F-42B5-8137-9DF3F51BA10A}">
+      <p15:sldGuideLst xmlns:p15="http://schemas.microsoft.com/office/powerpoint/2012/main">
+        <p15:guide id="1" orient="horz" pos="2160">
+          <p15:clr>
+            <a:srgbClr val="A4A3A4"/>
+          </p15:clr>
+        </p15:guide>
+        <p15:guide id="2" pos="2880">
+          <p15:clr>
+            <a:srgbClr val="A4A3A4"/>
+          </p15:clr>
+        </p15:guide>
+      </p15:sldGuideLst>
+    </p:ext>
+  </p:extLst>
 </p:presentation>
+</file>
+
+<file path=ppt/notesMasters/notesMaster1.xml><?xml version="1.0" encoding="utf-8"?>
+<p:notesMaster xmlns:a="http://schemas.openxmlformats.org/drawingml/2006/main" xmlns:r="http://schemas.openxmlformats.org/officeDocument/2006/relationships" xmlns:p="http://schemas.openxmlformats.org/presentationml/2006/main">
+  <p:cSld>
+    <p:bg>
+      <p:bgRef idx="1001">
+        <a:schemeClr val="bg1"/>
+      </p:bgRef>
+    </p:bg>
+    <p:spTree>
+      <p:nvGrpSpPr>
+        <p:cNvPr id="1" name=""/>
+        <p:cNvGrpSpPr/>
+        <p:nvPr/>
+      </p:nvGrpSpPr>
+      <p:grpSpPr>
+        <a:xfrm>
+          <a:off x="0" y="0"/>
+          <a:ext cx="0" cy="0"/>
+          <a:chOff x="0" y="0"/>
+          <a:chExt cx="0" cy="0"/>
+        </a:xfrm>
+      </p:grpSpPr>
+      <p:sp>
+        <p:nvSpPr>
+          <p:cNvPr id="2" name="Header Placeholder 1"/>
+          <p:cNvSpPr>
+            <a:spLocks noGrp="1"/>
+          </p:cNvSpPr>
+          <p:nvPr>
+            <p:ph type="hdr" sz="quarter"/>
+          </p:nvPr>
+        </p:nvSpPr>
+        <p:spPr>
+          <a:xfrm>
+            <a:off x="0" y="0"/>
+            <a:ext cx="2971800" cy="458788"/>
+          </a:xfrm>
+          <a:prstGeom prst="rect">
+            <a:avLst/>
+          </a:prstGeom>
+        </p:spPr>
+        <p:txBody>
+          <a:bodyPr vert="horz" lIns="91440" tIns="45720" rIns="91440" bIns="45720" rtlCol="0"/>
+          <a:lstStyle>
+            <a:lvl1pPr algn="l">
+              <a:defRPr sz="1200"/>
+            </a:lvl1pPr>
+          </a:lstStyle>
+          <a:p>
+            <a:endParaRPr lang="en-IN"/>
+          </a:p>
+        </p:txBody>
+      </p:sp>
+      <p:sp>
+        <p:nvSpPr>
+          <p:cNvPr id="3" name="Date Placeholder 2"/>
+          <p:cNvSpPr>
+            <a:spLocks noGrp="1"/>
+          </p:cNvSpPr>
+          <p:nvPr>
+            <p:ph type="dt" idx="1"/>
+          </p:nvPr>
+        </p:nvSpPr>
+        <p:spPr>
+          <a:xfrm>
+            <a:off x="3884613" y="0"/>
+            <a:ext cx="2971800" cy="458788"/>
+          </a:xfrm>
+          <a:prstGeom prst="rect">
+            <a:avLst/>
+          </a:prstGeom>
+        </p:spPr>
+        <p:txBody>
+          <a:bodyPr vert="horz" lIns="91440" tIns="45720" rIns="91440" bIns="45720" rtlCol="0"/>
+          <a:lstStyle>
+            <a:lvl1pPr algn="r">
+              <a:defRPr sz="1200"/>
+            </a:lvl1pPr>
+          </a:lstStyle>
+          <a:p>
+            <a:fld id="{A0C25B52-7199-4482-8FC4-A648D9702226}" type="datetimeFigureOut">
+              <a:rPr lang="en-IN" smtClean="0"/>
+              <a:t>20-03-2026</a:t>
+            </a:fld>
+            <a:endParaRPr lang="en-IN"/>
+          </a:p>
+        </p:txBody>
+      </p:sp>
+      <p:sp>
+        <p:nvSpPr>
+          <p:cNvPr id="4" name="Slide Image Placeholder 3"/>
+          <p:cNvSpPr>
+            <a:spLocks noGrp="1" noRot="1" noChangeAspect="1"/>
+          </p:cNvSpPr>
+          <p:nvPr>
+            <p:ph type="sldImg" idx="2"/>
+          </p:nvPr>
+        </p:nvSpPr>
+        <p:spPr>
+          <a:xfrm>
+            <a:off x="685800" y="1143000"/>
+            <a:ext cx="5486400" cy="3086100"/>
+          </a:xfrm>
+          <a:prstGeom prst="rect">
+            <a:avLst/>
+          </a:prstGeom>
+          <a:noFill/>
+          <a:ln w="12700">
+            <a:solidFill>
+              <a:prstClr val="black"/>
+            </a:solidFill>
+          </a:ln>
+        </p:spPr>
+        <p:txBody>
+          <a:bodyPr vert="horz" lIns="91440" tIns="45720" rIns="91440" bIns="45720" rtlCol="0" anchor="ctr"/>
+          <a:lstStyle/>
+          <a:p>
+            <a:endParaRPr lang="en-IN"/>
+          </a:p>
+        </p:txBody>
+      </p:sp>
+      <p:sp>
+        <p:nvSpPr>
+          <p:cNvPr id="5" name="Notes Placeholder 4"/>
+          <p:cNvSpPr>
+            <a:spLocks noGrp="1"/>
+          </p:cNvSpPr>
+          <p:nvPr>
+            <p:ph type="body" sz="quarter" idx="3"/>
+          </p:nvPr>
+        </p:nvSpPr>
+        <p:spPr>
+          <a:xfrm>
+            <a:off x="685800" y="4400550"/>
+            <a:ext cx="5486400" cy="3600450"/>
+          </a:xfrm>
+          <a:prstGeom prst="rect">
+            <a:avLst/>
+          </a:prstGeom>
+        </p:spPr>
+        <p:txBody>
+          <a:bodyPr vert="horz" lIns="91440" tIns="45720" rIns="91440" bIns="45720" rtlCol="0"/>
+          <a:lstStyle/>
+          <a:p>
+            <a:pPr lvl="0"/>
+            <a:r>
+              <a:rPr lang="en-US"/>
+              <a:t>Click to edit Master text styles</a:t>
+            </a:r>
+          </a:p>
+          <a:p>
+            <a:pPr lvl="1"/>
+            <a:r>
+              <a:rPr lang="en-US"/>
+              <a:t>Second level</a:t>
+            </a:r>
+          </a:p>
+          <a:p>
+            <a:pPr lvl="2"/>
+            <a:r>
+              <a:rPr lang="en-US"/>
+              <a:t>Third level</a:t>
+            </a:r>
+          </a:p>
+          <a:p>
+            <a:pPr lvl="3"/>
+            <a:r>
+              <a:rPr lang="en-US"/>
+              <a:t>Fourth level</a:t>
+            </a:r>
+          </a:p>
+          <a:p>
+            <a:pPr lvl="4"/>
+            <a:r>
+              <a:rPr lang="en-US"/>
+              <a:t>Fifth level</a:t>
+            </a:r>
+            <a:endParaRPr lang="en-IN"/>
+          </a:p>
+        </p:txBody>
+      </p:sp>
+      <p:sp>
+        <p:nvSpPr>
+          <p:cNvPr id="6" name="Footer Placeholder 5"/>
+          <p:cNvSpPr>
+            <a:spLocks noGrp="1"/>
+          </p:cNvSpPr>
+          <p:nvPr>
+            <p:ph type="ftr" sz="quarter" idx="4"/>
+          </p:nvPr>
+        </p:nvSpPr>
+        <p:spPr>
+          <a:xfrm>
+            <a:off x="0" y="8685213"/>
+            <a:ext cx="2971800" cy="458787"/>
+          </a:xfrm>
+          <a:prstGeom prst="rect">
+            <a:avLst/>
+          </a:prstGeom>
+        </p:spPr>
+        <p:txBody>
+          <a:bodyPr vert="horz" lIns="91440" tIns="45720" rIns="91440" bIns="45720" rtlCol="0" anchor="b"/>
+          <a:lstStyle>
+            <a:lvl1pPr algn="l">
+              <a:defRPr sz="1200"/>
+            </a:lvl1pPr>
+          </a:lstStyle>
+          <a:p>
+            <a:endParaRPr lang="en-IN"/>
+          </a:p>
+        </p:txBody>
+      </p:sp>
+      <p:sp>
+        <p:nvSpPr>
+          <p:cNvPr id="7" name="Slide Number Placeholder 6"/>
+          <p:cNvSpPr>
+            <a:spLocks noGrp="1"/>
+          </p:cNvSpPr>
+          <p:nvPr>
+            <p:ph type="sldNum" sz="quarter" idx="5"/>
+          </p:nvPr>
+        </p:nvSpPr>
+        <p:spPr>
+          <a:xfrm>
+            <a:off x="3884613" y="8685213"/>
+            <a:ext cx="2971800" cy="458787"/>
+          </a:xfrm>
+          <a:prstGeom prst="rect">
+            <a:avLst/>
+          </a:prstGeom>
+        </p:spPr>
+        <p:txBody>
+          <a:bodyPr vert="horz" lIns="91440" tIns="45720" rIns="91440" bIns="45720" rtlCol="0" anchor="b"/>
+          <a:lstStyle>
+            <a:lvl1pPr algn="r">
+              <a:defRPr sz="1200"/>
+            </a:lvl1pPr>
+          </a:lstStyle>
+          <a:p>
+            <a:fld id="{485C3235-8983-40FA-AC4B-1A059C60BFAC}" type="slidenum">
+              <a:rPr lang="en-IN" smtClean="0"/>
+              <a:t>‹#›</a:t>
+            </a:fld>
+            <a:endParaRPr lang="en-IN"/>
+          </a:p>
+        </p:txBody>
+      </p:sp>
+    </p:spTree>
+    <p:extLst>
+      <p:ext uri="{BB962C8B-B14F-4D97-AF65-F5344CB8AC3E}">
+        <p14:creationId xmlns:p14="http://schemas.microsoft.com/office/powerpoint/2010/main" val="4272174472"/>
+      </p:ext>
+    </p:extLst>
+  </p:cSld>
+  <p:clrMap bg1="lt1" tx1="dk1" bg2="lt2" tx2="dk2" accent1="accent1" accent2="accent2" accent3="accent3" accent4="accent4" accent5="accent5" accent6="accent6" hlink="hlink" folHlink="folHlink"/>
+  <p:notesStyle>
+    <a:lvl1pPr marL="0" algn="l" defTabSz="914400" rtl="0" eaLnBrk="1" latinLnBrk="0" hangingPunct="1">
+      <a:defRPr sz="1200" kern="1200">
+        <a:solidFill>
+          <a:schemeClr val="tx1"/>
+        </a:solidFill>
+        <a:latin typeface="+mn-lt"/>
+        <a:ea typeface="+mn-ea"/>
+        <a:cs typeface="+mn-cs"/>
+      </a:defRPr>
+    </a:lvl1pPr>
+    <a:lvl2pPr marL="457200" algn="l" defTabSz="914400" rtl="0" eaLnBrk="1" latinLnBrk="0" hangingPunct="1">
+      <a:defRPr sz="1200" kern="1200">
+        <a:solidFill>
+          <a:schemeClr val="tx1"/>
+        </a:solidFill>
+        <a:latin typeface="+mn-lt"/>
+        <a:ea typeface="+mn-ea"/>
+        <a:cs typeface="+mn-cs"/>
+      </a:defRPr>
+    </a:lvl2pPr>
+    <a:lvl3pPr marL="914400" algn="l" defTabSz="914400" rtl="0" eaLnBrk="1" latinLnBrk="0" hangingPunct="1">
+      <a:defRPr sz="1200" kern="1200">
+        <a:solidFill>
+          <a:schemeClr val="tx1"/>
+        </a:solidFill>
+        <a:latin typeface="+mn-lt"/>
+        <a:ea typeface="+mn-ea"/>
+        <a:cs typeface="+mn-cs"/>
+      </a:defRPr>
+    </a:lvl3pPr>
+    <a:lvl4pPr marL="1371600" algn="l" defTabSz="914400" rtl="0" eaLnBrk="1" latinLnBrk="0" hangingPunct="1">
+      <a:defRPr sz="1200" kern="1200">
+        <a:solidFill>
+          <a:schemeClr val="tx1"/>
+        </a:solidFill>
+        <a:latin typeface="+mn-lt"/>
+        <a:ea typeface="+mn-ea"/>
+        <a:cs typeface="+mn-cs"/>
+      </a:defRPr>
+    </a:lvl4pPr>
+    <a:lvl5pPr marL="1828800" algn="l" defTabSz="914400" rtl="0" eaLnBrk="1" latinLnBrk="0" hangingPunct="1">
+      <a:defRPr sz="1200" kern="1200">
+        <a:solidFill>
+          <a:schemeClr val="tx1"/>
+        </a:solidFill>
+        <a:latin typeface="+mn-lt"/>
+        <a:ea typeface="+mn-ea"/>
+        <a:cs typeface="+mn-cs"/>
+      </a:defRPr>
+    </a:lvl5pPr>
+    <a:lvl6pPr marL="2286000" algn="l" defTabSz="914400" rtl="0" eaLnBrk="1" latinLnBrk="0" hangingPunct="1">
+      <a:defRPr sz="1200" kern="1200">
+        <a:solidFill>
+          <a:schemeClr val="tx1"/>
+        </a:solidFill>
+        <a:latin typeface="+mn-lt"/>
+        <a:ea typeface="+mn-ea"/>
+        <a:cs typeface="+mn-cs"/>
+      </a:defRPr>
+    </a:lvl6pPr>
+    <a:lvl7pPr marL="2743200" algn="l" defTabSz="914400" rtl="0" eaLnBrk="1" latinLnBrk="0" hangingPunct="1">
+      <a:defRPr sz="1200" kern="1200">
+        <a:solidFill>
+          <a:schemeClr val="tx1"/>
+        </a:solidFill>
+        <a:latin typeface="+mn-lt"/>
+        <a:ea typeface="+mn-ea"/>
+        <a:cs typeface="+mn-cs"/>
+      </a:defRPr>
+    </a:lvl7pPr>
+    <a:lvl8pPr marL="3200400" algn="l" defTabSz="914400" rtl="0" eaLnBrk="1" latinLnBrk="0" hangingPunct="1">
+      <a:defRPr sz="1200" kern="1200">
+        <a:solidFill>
+          <a:schemeClr val="tx1"/>
+        </a:solidFill>
+        <a:latin typeface="+mn-lt"/>
+        <a:ea typeface="+mn-ea"/>
+        <a:cs typeface="+mn-cs"/>
+      </a:defRPr>
+    </a:lvl8pPr>
+    <a:lvl9pPr marL="3657600" algn="l" defTabSz="914400" rtl="0" eaLnBrk="1" latinLnBrk="0" hangingPunct="1">
+      <a:defRPr sz="1200" kern="1200">
+        <a:solidFill>
+          <a:schemeClr val="tx1"/>
+        </a:solidFill>
+        <a:latin typeface="+mn-lt"/>
+        <a:ea typeface="+mn-ea"/>
+        <a:cs typeface="+mn-cs"/>
+      </a:defRPr>
+    </a:lvl9pPr>
+  </p:notesStyle>
+</p:notesMaster>
+</file>
+
+<file path=ppt/notesSlides/notesSlide1.xml><?xml version="1.0" encoding="utf-8"?>
+<p:notes xmlns:a="http://schemas.openxmlformats.org/drawingml/2006/main" xmlns:r="http://schemas.openxmlformats.org/officeDocument/2006/relationships" xmlns:p="http://schemas.openxmlformats.org/presentationml/2006/main">
+  <p:cSld>
+    <p:spTree>
+      <p:nvGrpSpPr>
+        <p:cNvPr id="1" name=""/>
+        <p:cNvGrpSpPr/>
+        <p:nvPr/>
+      </p:nvGrpSpPr>
+      <p:grpSpPr>
+        <a:xfrm>
+          <a:off x="0" y="0"/>
+          <a:ext cx="0" cy="0"/>
+          <a:chOff x="0" y="0"/>
+          <a:chExt cx="0" cy="0"/>
+        </a:xfrm>
+      </p:grpSpPr>
+      <p:sp>
+        <p:nvSpPr>
+          <p:cNvPr id="2" name="Slide Image Placeholder 1"/>
+          <p:cNvSpPr>
+            <a:spLocks noGrp="1" noRot="1" noChangeAspect="1"/>
+          </p:cNvSpPr>
+          <p:nvPr>
+            <p:ph type="sldImg"/>
+          </p:nvPr>
+        </p:nvSpPr>
+        <p:spPr/>
+      </p:sp>
+      <p:sp>
+        <p:nvSpPr>
+          <p:cNvPr id="3" name="Notes Placeholder 2"/>
+          <p:cNvSpPr>
+            <a:spLocks noGrp="1"/>
+          </p:cNvSpPr>
+          <p:nvPr>
+            <p:ph type="body" idx="1"/>
+          </p:nvPr>
+        </p:nvSpPr>
+        <p:spPr/>
+        <p:txBody>
+          <a:bodyPr/>
+          <a:lstStyle/>
+          <a:p>
+            <a:endParaRPr lang="en-IN" dirty="0"/>
+          </a:p>
+        </p:txBody>
+      </p:sp>
+      <p:sp>
+        <p:nvSpPr>
+          <p:cNvPr id="4" name="Slide Number Placeholder 3"/>
+          <p:cNvSpPr>
+            <a:spLocks noGrp="1"/>
+          </p:cNvSpPr>
+          <p:nvPr>
+            <p:ph type="sldNum" sz="quarter" idx="5"/>
+          </p:nvPr>
+        </p:nvSpPr>
+        <p:spPr/>
+        <p:txBody>
+          <a:bodyPr/>
+          <a:lstStyle/>
+          <a:p>
+            <a:fld id="{485C3235-8983-40FA-AC4B-1A059C60BFAC}" type="slidenum">
+              <a:rPr lang="en-IN" smtClean="0"/>
+              <a:t>1</a:t>
+            </a:fld>
+            <a:endParaRPr lang="en-IN"/>
+          </a:p>
+        </p:txBody>
+      </p:sp>
+    </p:spTree>
+    <p:extLst>
+      <p:ext uri="{BB962C8B-B14F-4D97-AF65-F5344CB8AC3E}">
+        <p14:creationId xmlns:p14="http://schemas.microsoft.com/office/powerpoint/2010/main" val="2960760953"/>
+      </p:ext>
+    </p:extLst>
+  </p:cSld>
+  <p:clrMapOvr>
+    <a:masterClrMapping/>
+  </p:clrMapOvr>
+</p:notes>
+</file>
+
+<file path=ppt/notesSlides/notesSlide2.xml><?xml version="1.0" encoding="utf-8"?>
+<p:notes xmlns:a="http://schemas.openxmlformats.org/drawingml/2006/main" xmlns:r="http://schemas.openxmlformats.org/officeDocument/2006/relationships" xmlns:p="http://schemas.openxmlformats.org/presentationml/2006/main">
+  <p:cSld>
+    <p:spTree>
+      <p:nvGrpSpPr>
+        <p:cNvPr id="1" name=""/>
+        <p:cNvGrpSpPr/>
+        <p:nvPr/>
+      </p:nvGrpSpPr>
+      <p:grpSpPr>
+        <a:xfrm>
+          <a:off x="0" y="0"/>
+          <a:ext cx="0" cy="0"/>
+          <a:chOff x="0" y="0"/>
+          <a:chExt cx="0" cy="0"/>
+        </a:xfrm>
+      </p:grpSpPr>
+      <p:sp>
+        <p:nvSpPr>
+          <p:cNvPr id="2" name="Slide Image Placeholder 1"/>
+          <p:cNvSpPr>
+            <a:spLocks noGrp="1" noRot="1" noChangeAspect="1"/>
+          </p:cNvSpPr>
+          <p:nvPr>
+            <p:ph type="sldImg"/>
+          </p:nvPr>
+        </p:nvSpPr>
+        <p:spPr/>
+        <p:txBody>
+          <a:bodyPr/>
+          <a:lstStyle/>
+          <a:p>
+            <a:endParaRPr lang="en-IN"/>
+          </a:p>
+        </p:txBody>
+      </p:sp>
+      <p:sp>
+        <p:nvSpPr>
+          <p:cNvPr id="3" name="Notes Placeholder 2"/>
+          <p:cNvSpPr>
+            <a:spLocks noGrp="1"/>
+          </p:cNvSpPr>
+          <p:nvPr>
+            <p:ph type="body" idx="1"/>
+          </p:nvPr>
+        </p:nvSpPr>
+        <p:spPr/>
+        <p:txBody>
+          <a:bodyPr/>
+          <a:lstStyle/>
+          <a:p>
+            <a:endParaRPr lang="en-IN" dirty="0"/>
+          </a:p>
+        </p:txBody>
+      </p:sp>
+      <p:sp>
+        <p:nvSpPr>
+          <p:cNvPr id="4" name="Slide Number Placeholder 3"/>
+          <p:cNvSpPr>
+            <a:spLocks noGrp="1"/>
+          </p:cNvSpPr>
+          <p:nvPr>
+            <p:ph type="sldNum" sz="quarter" idx="5"/>
+          </p:nvPr>
+        </p:nvSpPr>
+        <p:spPr/>
+        <p:txBody>
+          <a:bodyPr/>
+          <a:lstStyle/>
+          <a:p>
+            <a:fld id="{485C3235-8983-40FA-AC4B-1A059C60BFAC}" type="slidenum">
+              <a:rPr lang="en-IN" smtClean="0"/>
+              <a:t>3</a:t>
+            </a:fld>
+            <a:endParaRPr lang="en-IN"/>
+          </a:p>
+        </p:txBody>
+      </p:sp>
+    </p:spTree>
+    <p:extLst>
+      <p:ext uri="{BB962C8B-B14F-4D97-AF65-F5344CB8AC3E}">
+        <p14:creationId xmlns:p14="http://schemas.microsoft.com/office/powerpoint/2010/main" val="2784847273"/>
+      </p:ext>
+    </p:extLst>
+  </p:cSld>
+  <p:clrMapOvr>
+    <a:masterClrMapping/>
+  </p:clrMapOvr>
+</p:notes>
 </file>
 
 <file path=ppt/slideLayouts/slideLayout1.xml><?xml version="1.0" encoding="utf-8"?>
@@ -162,10 +706,9 @@
           <a:lstStyle/>
           <a:p>
             <a:r>
-              <a:rPr lang="en-US" smtClean="0"/>
+              <a:rPr lang="en-US"/>
               <a:t>Click to edit Master title style</a:t>
             </a:r>
-            <a:endParaRPr lang="en-US"/>
           </a:p>
         </p:txBody>
       </p:sp>
@@ -281,10 +824,9 @@
           </a:lstStyle>
           <a:p>
             <a:r>
-              <a:rPr lang="en-US" smtClean="0"/>
+              <a:rPr lang="en-US"/>
               <a:t>Click to edit Master subtitle style</a:t>
             </a:r>
-            <a:endParaRPr lang="en-US"/>
           </a:p>
         </p:txBody>
       </p:sp>
@@ -305,7 +847,7 @@
           <a:p>
             <a:fld id="{5BCAD085-E8A6-8845-BD4E-CB4CCA059FC4}" type="datetimeFigureOut">
               <a:rPr lang="en-US" smtClean="0"/>
-              <a:t>1/27/13</a:t>
+              <a:t>3/20/2026</a:t>
             </a:fld>
             <a:endParaRPr lang="en-US"/>
           </a:p>
@@ -399,10 +941,9 @@
           <a:lstStyle/>
           <a:p>
             <a:r>
-              <a:rPr lang="en-US" smtClean="0"/>
+              <a:rPr lang="en-US"/>
               <a:t>Click to edit Master title style</a:t>
             </a:r>
-            <a:endParaRPr lang="en-US"/>
           </a:p>
         </p:txBody>
       </p:sp>
@@ -423,38 +964,37 @@
           <a:p>
             <a:pPr lvl="0"/>
             <a:r>
-              <a:rPr lang="en-US" smtClean="0"/>
+              <a:rPr lang="en-US"/>
               <a:t>Click to edit Master text styles</a:t>
             </a:r>
           </a:p>
           <a:p>
             <a:pPr lvl="1"/>
             <a:r>
-              <a:rPr lang="en-US" smtClean="0"/>
+              <a:rPr lang="en-US"/>
               <a:t>Second level</a:t>
             </a:r>
           </a:p>
           <a:p>
             <a:pPr lvl="2"/>
             <a:r>
-              <a:rPr lang="en-US" smtClean="0"/>
+              <a:rPr lang="en-US"/>
               <a:t>Third level</a:t>
             </a:r>
           </a:p>
           <a:p>
             <a:pPr lvl="3"/>
             <a:r>
-              <a:rPr lang="en-US" smtClean="0"/>
+              <a:rPr lang="en-US"/>
               <a:t>Fourth level</a:t>
             </a:r>
           </a:p>
           <a:p>
             <a:pPr lvl="4"/>
             <a:r>
-              <a:rPr lang="en-US" smtClean="0"/>
+              <a:rPr lang="en-US"/>
               <a:t>Fifth level</a:t>
             </a:r>
-            <a:endParaRPr lang="en-US"/>
           </a:p>
         </p:txBody>
       </p:sp>
@@ -475,7 +1015,7 @@
           <a:p>
             <a:fld id="{5BCAD085-E8A6-8845-BD4E-CB4CCA059FC4}" type="datetimeFigureOut">
               <a:rPr lang="en-US" smtClean="0"/>
-              <a:t>1/27/13</a:t>
+              <a:t>3/20/2026</a:t>
             </a:fld>
             <a:endParaRPr lang="en-US"/>
           </a:p>
@@ -574,10 +1114,9 @@
           <a:lstStyle/>
           <a:p>
             <a:r>
-              <a:rPr lang="en-US" smtClean="0"/>
+              <a:rPr lang="en-US"/>
               <a:t>Click to edit Master title style</a:t>
             </a:r>
-            <a:endParaRPr lang="en-US"/>
           </a:p>
         </p:txBody>
       </p:sp>
@@ -603,38 +1142,37 @@
           <a:p>
             <a:pPr lvl="0"/>
             <a:r>
-              <a:rPr lang="en-US" smtClean="0"/>
+              <a:rPr lang="en-US"/>
               <a:t>Click to edit Master text styles</a:t>
             </a:r>
           </a:p>
           <a:p>
             <a:pPr lvl="1"/>
             <a:r>
-              <a:rPr lang="en-US" smtClean="0"/>
+              <a:rPr lang="en-US"/>
               <a:t>Second level</a:t>
             </a:r>
           </a:p>
           <a:p>
             <a:pPr lvl="2"/>
             <a:r>
-              <a:rPr lang="en-US" smtClean="0"/>
+              <a:rPr lang="en-US"/>
               <a:t>Third level</a:t>
             </a:r>
           </a:p>
           <a:p>
             <a:pPr lvl="3"/>
             <a:r>
-              <a:rPr lang="en-US" smtClean="0"/>
+              <a:rPr lang="en-US"/>
               <a:t>Fourth level</a:t>
             </a:r>
           </a:p>
           <a:p>
             <a:pPr lvl="4"/>
             <a:r>
-              <a:rPr lang="en-US" smtClean="0"/>
+              <a:rPr lang="en-US"/>
               <a:t>Fifth level</a:t>
             </a:r>
-            <a:endParaRPr lang="en-US"/>
           </a:p>
         </p:txBody>
       </p:sp>
@@ -655,7 +1193,7 @@
           <a:p>
             <a:fld id="{5BCAD085-E8A6-8845-BD4E-CB4CCA059FC4}" type="datetimeFigureOut">
               <a:rPr lang="en-US" smtClean="0"/>
-              <a:t>1/27/13</a:t>
+              <a:t>3/20/2026</a:t>
             </a:fld>
             <a:endParaRPr lang="en-US"/>
           </a:p>
@@ -749,10 +1287,9 @@
           <a:lstStyle/>
           <a:p>
             <a:r>
-              <a:rPr lang="en-US" smtClean="0"/>
+              <a:rPr lang="en-US"/>
               <a:t>Click to edit Master title style</a:t>
             </a:r>
-            <a:endParaRPr lang="en-US"/>
           </a:p>
         </p:txBody>
       </p:sp>
@@ -773,38 +1310,37 @@
           <a:p>
             <a:pPr lvl="0"/>
             <a:r>
-              <a:rPr lang="en-US" smtClean="0"/>
+              <a:rPr lang="en-US"/>
               <a:t>Click to edit Master text styles</a:t>
             </a:r>
           </a:p>
           <a:p>
             <a:pPr lvl="1"/>
             <a:r>
-              <a:rPr lang="en-US" smtClean="0"/>
+              <a:rPr lang="en-US"/>
               <a:t>Second level</a:t>
             </a:r>
           </a:p>
           <a:p>
             <a:pPr lvl="2"/>
             <a:r>
-              <a:rPr lang="en-US" smtClean="0"/>
+              <a:rPr lang="en-US"/>
               <a:t>Third level</a:t>
             </a:r>
           </a:p>
           <a:p>
             <a:pPr lvl="3"/>
             <a:r>
-              <a:rPr lang="en-US" smtClean="0"/>
+              <a:rPr lang="en-US"/>
               <a:t>Fourth level</a:t>
             </a:r>
           </a:p>
           <a:p>
             <a:pPr lvl="4"/>
             <a:r>
-              <a:rPr lang="en-US" smtClean="0"/>
+              <a:rPr lang="en-US"/>
               <a:t>Fifth level</a:t>
             </a:r>
-            <a:endParaRPr lang="en-US"/>
           </a:p>
         </p:txBody>
       </p:sp>
@@ -825,7 +1361,7 @@
           <a:p>
             <a:fld id="{5BCAD085-E8A6-8845-BD4E-CB4CCA059FC4}" type="datetimeFigureOut">
               <a:rPr lang="en-US" smtClean="0"/>
-              <a:t>1/27/13</a:t>
+              <a:t>3/20/2026</a:t>
             </a:fld>
             <a:endParaRPr lang="en-US"/>
           </a:p>
@@ -928,10 +1464,9 @@
           </a:lstStyle>
           <a:p>
             <a:r>
-              <a:rPr lang="en-US" smtClean="0"/>
+              <a:rPr lang="en-US"/>
               <a:t>Click to edit Master title style</a:t>
             </a:r>
-            <a:endParaRPr lang="en-US"/>
           </a:p>
         </p:txBody>
       </p:sp>
@@ -1048,7 +1583,7 @@
           <a:p>
             <a:pPr lvl="0"/>
             <a:r>
-              <a:rPr lang="en-US" smtClean="0"/>
+              <a:rPr lang="en-US"/>
               <a:t>Click to edit Master text styles</a:t>
             </a:r>
           </a:p>
@@ -1071,7 +1606,7 @@
           <a:p>
             <a:fld id="{5BCAD085-E8A6-8845-BD4E-CB4CCA059FC4}" type="datetimeFigureOut">
               <a:rPr lang="en-US" smtClean="0"/>
-              <a:t>1/27/13</a:t>
+              <a:t>3/20/2026</a:t>
             </a:fld>
             <a:endParaRPr lang="en-US"/>
           </a:p>
@@ -1165,10 +1700,9 @@
           <a:lstStyle/>
           <a:p>
             <a:r>
-              <a:rPr lang="en-US" smtClean="0"/>
+              <a:rPr lang="en-US"/>
               <a:t>Click to edit Master title style</a:t>
             </a:r>
-            <a:endParaRPr lang="en-US"/>
           </a:p>
         </p:txBody>
       </p:sp>
@@ -1222,38 +1756,37 @@
           <a:p>
             <a:pPr lvl="0"/>
             <a:r>
-              <a:rPr lang="en-US" smtClean="0"/>
+              <a:rPr lang="en-US"/>
               <a:t>Click to edit Master text styles</a:t>
             </a:r>
           </a:p>
           <a:p>
             <a:pPr lvl="1"/>
             <a:r>
-              <a:rPr lang="en-US" smtClean="0"/>
+              <a:rPr lang="en-US"/>
               <a:t>Second level</a:t>
             </a:r>
           </a:p>
           <a:p>
             <a:pPr lvl="2"/>
             <a:r>
-              <a:rPr lang="en-US" smtClean="0"/>
+              <a:rPr lang="en-US"/>
               <a:t>Third level</a:t>
             </a:r>
           </a:p>
           <a:p>
             <a:pPr lvl="3"/>
             <a:r>
-              <a:rPr lang="en-US" smtClean="0"/>
+              <a:rPr lang="en-US"/>
               <a:t>Fourth level</a:t>
             </a:r>
           </a:p>
           <a:p>
             <a:pPr lvl="4"/>
             <a:r>
-              <a:rPr lang="en-US" smtClean="0"/>
+              <a:rPr lang="en-US"/>
               <a:t>Fifth level</a:t>
             </a:r>
-            <a:endParaRPr lang="en-US"/>
           </a:p>
         </p:txBody>
       </p:sp>
@@ -1307,38 +1840,37 @@
           <a:p>
             <a:pPr lvl="0"/>
             <a:r>
-              <a:rPr lang="en-US" smtClean="0"/>
+              <a:rPr lang="en-US"/>
               <a:t>Click to edit Master text styles</a:t>
             </a:r>
           </a:p>
           <a:p>
             <a:pPr lvl="1"/>
             <a:r>
-              <a:rPr lang="en-US" smtClean="0"/>
+              <a:rPr lang="en-US"/>
               <a:t>Second level</a:t>
             </a:r>
           </a:p>
           <a:p>
             <a:pPr lvl="2"/>
             <a:r>
-              <a:rPr lang="en-US" smtClean="0"/>
+              <a:rPr lang="en-US"/>
               <a:t>Third level</a:t>
             </a:r>
           </a:p>
           <a:p>
             <a:pPr lvl="3"/>
             <a:r>
-              <a:rPr lang="en-US" smtClean="0"/>
+              <a:rPr lang="en-US"/>
               <a:t>Fourth level</a:t>
             </a:r>
           </a:p>
           <a:p>
             <a:pPr lvl="4"/>
             <a:r>
-              <a:rPr lang="en-US" smtClean="0"/>
+              <a:rPr lang="en-US"/>
               <a:t>Fifth level</a:t>
             </a:r>
-            <a:endParaRPr lang="en-US"/>
           </a:p>
         </p:txBody>
       </p:sp>
@@ -1359,7 +1891,7 @@
           <a:p>
             <a:fld id="{5BCAD085-E8A6-8845-BD4E-CB4CCA059FC4}" type="datetimeFigureOut">
               <a:rPr lang="en-US" smtClean="0"/>
-              <a:t>1/27/13</a:t>
+              <a:t>3/20/2026</a:t>
             </a:fld>
             <a:endParaRPr lang="en-US"/>
           </a:p>
@@ -1457,10 +1989,9 @@
           </a:lstStyle>
           <a:p>
             <a:r>
-              <a:rPr lang="en-US" smtClean="0"/>
+              <a:rPr lang="en-US"/>
               <a:t>Click to edit Master title style</a:t>
             </a:r>
-            <a:endParaRPr lang="en-US"/>
           </a:p>
         </p:txBody>
       </p:sp>
@@ -1523,7 +2054,7 @@
           <a:p>
             <a:pPr lvl="0"/>
             <a:r>
-              <a:rPr lang="en-US" smtClean="0"/>
+              <a:rPr lang="en-US"/>
               <a:t>Click to edit Master text styles</a:t>
             </a:r>
           </a:p>
@@ -1579,38 +2110,37 @@
           <a:p>
             <a:pPr lvl="0"/>
             <a:r>
-              <a:rPr lang="en-US" smtClean="0"/>
+              <a:rPr lang="en-US"/>
               <a:t>Click to edit Master text styles</a:t>
             </a:r>
           </a:p>
           <a:p>
             <a:pPr lvl="1"/>
             <a:r>
-              <a:rPr lang="en-US" smtClean="0"/>
+              <a:rPr lang="en-US"/>
               <a:t>Second level</a:t>
             </a:r>
           </a:p>
           <a:p>
             <a:pPr lvl="2"/>
             <a:r>
-              <a:rPr lang="en-US" smtClean="0"/>
+              <a:rPr lang="en-US"/>
               <a:t>Third level</a:t>
             </a:r>
           </a:p>
           <a:p>
             <a:pPr lvl="3"/>
             <a:r>
-              <a:rPr lang="en-US" smtClean="0"/>
+              <a:rPr lang="en-US"/>
               <a:t>Fourth level</a:t>
             </a:r>
           </a:p>
           <a:p>
             <a:pPr lvl="4"/>
             <a:r>
-              <a:rPr lang="en-US" smtClean="0"/>
+              <a:rPr lang="en-US"/>
               <a:t>Fifth level</a:t>
             </a:r>
-            <a:endParaRPr lang="en-US"/>
           </a:p>
         </p:txBody>
       </p:sp>
@@ -1673,7 +2203,7 @@
           <a:p>
             <a:pPr lvl="0"/>
             <a:r>
-              <a:rPr lang="en-US" smtClean="0"/>
+              <a:rPr lang="en-US"/>
               <a:t>Click to edit Master text styles</a:t>
             </a:r>
           </a:p>
@@ -1729,38 +2259,37 @@
           <a:p>
             <a:pPr lvl="0"/>
             <a:r>
-              <a:rPr lang="en-US" smtClean="0"/>
+              <a:rPr lang="en-US"/>
               <a:t>Click to edit Master text styles</a:t>
             </a:r>
           </a:p>
           <a:p>
             <a:pPr lvl="1"/>
             <a:r>
-              <a:rPr lang="en-US" smtClean="0"/>
+              <a:rPr lang="en-US"/>
               <a:t>Second level</a:t>
             </a:r>
           </a:p>
           <a:p>
             <a:pPr lvl="2"/>
             <a:r>
-              <a:rPr lang="en-US" smtClean="0"/>
+              <a:rPr lang="en-US"/>
               <a:t>Third level</a:t>
             </a:r>
           </a:p>
           <a:p>
             <a:pPr lvl="3"/>
             <a:r>
-              <a:rPr lang="en-US" smtClean="0"/>
+              <a:rPr lang="en-US"/>
               <a:t>Fourth level</a:t>
             </a:r>
           </a:p>
           <a:p>
             <a:pPr lvl="4"/>
             <a:r>
-              <a:rPr lang="en-US" smtClean="0"/>
+              <a:rPr lang="en-US"/>
               <a:t>Fifth level</a:t>
             </a:r>
-            <a:endParaRPr lang="en-US"/>
           </a:p>
         </p:txBody>
       </p:sp>
@@ -1781,7 +2310,7 @@
           <a:p>
             <a:fld id="{5BCAD085-E8A6-8845-BD4E-CB4CCA059FC4}" type="datetimeFigureOut">
               <a:rPr lang="en-US" smtClean="0"/>
-              <a:t>1/27/13</a:t>
+              <a:t>3/20/2026</a:t>
             </a:fld>
             <a:endParaRPr lang="en-US"/>
           </a:p>
@@ -1875,10 +2404,9 @@
           <a:lstStyle/>
           <a:p>
             <a:r>
-              <a:rPr lang="en-US" smtClean="0"/>
+              <a:rPr lang="en-US"/>
               <a:t>Click to edit Master title style</a:t>
             </a:r>
-            <a:endParaRPr lang="en-US"/>
           </a:p>
         </p:txBody>
       </p:sp>
@@ -1899,7 +2427,7 @@
           <a:p>
             <a:fld id="{5BCAD085-E8A6-8845-BD4E-CB4CCA059FC4}" type="datetimeFigureOut">
               <a:rPr lang="en-US" smtClean="0"/>
-              <a:t>1/27/13</a:t>
+              <a:t>3/20/2026</a:t>
             </a:fld>
             <a:endParaRPr lang="en-US"/>
           </a:p>
@@ -1994,7 +2522,7 @@
           <a:p>
             <a:fld id="{5BCAD085-E8A6-8845-BD4E-CB4CCA059FC4}" type="datetimeFigureOut">
               <a:rPr lang="en-US" smtClean="0"/>
-              <a:t>1/27/13</a:t>
+              <a:t>3/20/2026</a:t>
             </a:fld>
             <a:endParaRPr lang="en-US"/>
           </a:p>
@@ -2097,10 +2625,9 @@
           </a:lstStyle>
           <a:p>
             <a:r>
-              <a:rPr lang="en-US" smtClean="0"/>
+              <a:rPr lang="en-US"/>
               <a:t>Click to edit Master title style</a:t>
             </a:r>
-            <a:endParaRPr lang="en-US"/>
           </a:p>
         </p:txBody>
       </p:sp>
@@ -2154,38 +2681,37 @@
           <a:p>
             <a:pPr lvl="0"/>
             <a:r>
-              <a:rPr lang="en-US" smtClean="0"/>
+              <a:rPr lang="en-US"/>
               <a:t>Click to edit Master text styles</a:t>
             </a:r>
           </a:p>
           <a:p>
             <a:pPr lvl="1"/>
             <a:r>
-              <a:rPr lang="en-US" smtClean="0"/>
+              <a:rPr lang="en-US"/>
               <a:t>Second level</a:t>
             </a:r>
           </a:p>
           <a:p>
             <a:pPr lvl="2"/>
             <a:r>
-              <a:rPr lang="en-US" smtClean="0"/>
+              <a:rPr lang="en-US"/>
               <a:t>Third level</a:t>
             </a:r>
           </a:p>
           <a:p>
             <a:pPr lvl="3"/>
             <a:r>
-              <a:rPr lang="en-US" smtClean="0"/>
+              <a:rPr lang="en-US"/>
               <a:t>Fourth level</a:t>
             </a:r>
           </a:p>
           <a:p>
             <a:pPr lvl="4"/>
             <a:r>
-              <a:rPr lang="en-US" smtClean="0"/>
+              <a:rPr lang="en-US"/>
               <a:t>Fifth level</a:t>
             </a:r>
-            <a:endParaRPr lang="en-US"/>
           </a:p>
         </p:txBody>
       </p:sp>
@@ -2248,7 +2774,7 @@
           <a:p>
             <a:pPr lvl="0"/>
             <a:r>
-              <a:rPr lang="en-US" smtClean="0"/>
+              <a:rPr lang="en-US"/>
               <a:t>Click to edit Master text styles</a:t>
             </a:r>
           </a:p>
@@ -2271,7 +2797,7 @@
           <a:p>
             <a:fld id="{5BCAD085-E8A6-8845-BD4E-CB4CCA059FC4}" type="datetimeFigureOut">
               <a:rPr lang="en-US" smtClean="0"/>
-              <a:t>1/27/13</a:t>
+              <a:t>3/20/2026</a:t>
             </a:fld>
             <a:endParaRPr lang="en-US"/>
           </a:p>
@@ -2374,10 +2900,9 @@
           </a:lstStyle>
           <a:p>
             <a:r>
-              <a:rPr lang="en-US" smtClean="0"/>
+              <a:rPr lang="en-US"/>
               <a:t>Click to edit Master title style</a:t>
             </a:r>
-            <a:endParaRPr lang="en-US"/>
           </a:p>
         </p:txBody>
       </p:sp>
@@ -2501,7 +3026,7 @@
           <a:p>
             <a:pPr lvl="0"/>
             <a:r>
-              <a:rPr lang="en-US" smtClean="0"/>
+              <a:rPr lang="en-US"/>
               <a:t>Click to edit Master text styles</a:t>
             </a:r>
           </a:p>
@@ -2524,7 +3049,7 @@
           <a:p>
             <a:fld id="{5BCAD085-E8A6-8845-BD4E-CB4CCA059FC4}" type="datetimeFigureOut">
               <a:rPr lang="en-US" smtClean="0"/>
-              <a:t>1/27/13</a:t>
+              <a:t>3/20/2026</a:t>
             </a:fld>
             <a:endParaRPr lang="en-US"/>
           </a:p>
@@ -2633,10 +3158,9 @@
           <a:lstStyle/>
           <a:p>
             <a:r>
-              <a:rPr lang="en-US" smtClean="0"/>
+              <a:rPr lang="en-US"/>
               <a:t>Click to edit Master title style</a:t>
             </a:r>
-            <a:endParaRPr lang="en-US"/>
           </a:p>
         </p:txBody>
       </p:sp>
@@ -2667,38 +3191,37 @@
           <a:p>
             <a:pPr lvl="0"/>
             <a:r>
-              <a:rPr lang="en-US" smtClean="0"/>
+              <a:rPr lang="en-US"/>
               <a:t>Click to edit Master text styles</a:t>
             </a:r>
           </a:p>
           <a:p>
             <a:pPr lvl="1"/>
             <a:r>
-              <a:rPr lang="en-US" smtClean="0"/>
+              <a:rPr lang="en-US"/>
               <a:t>Second level</a:t>
             </a:r>
           </a:p>
           <a:p>
             <a:pPr lvl="2"/>
             <a:r>
-              <a:rPr lang="en-US" smtClean="0"/>
+              <a:rPr lang="en-US"/>
               <a:t>Third level</a:t>
             </a:r>
           </a:p>
           <a:p>
             <a:pPr lvl="3"/>
             <a:r>
-              <a:rPr lang="en-US" smtClean="0"/>
+              <a:rPr lang="en-US"/>
               <a:t>Fourth level</a:t>
             </a:r>
           </a:p>
           <a:p>
             <a:pPr lvl="4"/>
             <a:r>
-              <a:rPr lang="en-US" smtClean="0"/>
+              <a:rPr lang="en-US"/>
               <a:t>Fifth level</a:t>
             </a:r>
-            <a:endParaRPr lang="en-US"/>
           </a:p>
         </p:txBody>
       </p:sp>
@@ -2737,7 +3260,7 @@
           <a:p>
             <a:fld id="{5BCAD085-E8A6-8845-BD4E-CB4CCA059FC4}" type="datetimeFigureOut">
               <a:rPr lang="en-US" smtClean="0"/>
-              <a:t>1/27/13</a:t>
+              <a:t>3/20/2026</a:t>
             </a:fld>
             <a:endParaRPr lang="en-US"/>
           </a:p>
@@ -3096,7 +3619,7 @@
 </file>
 
 <file path=ppt/slides/slide1.xml><?xml version="1.0" encoding="utf-8"?>
-<p:sld xmlns:a="http://schemas.openxmlformats.org/drawingml/2006/main" xmlns:p="http://schemas.openxmlformats.org/presentationml/2006/main" xmlns:r="http://schemas.openxmlformats.org/officeDocument/2006/relationships">
+<p:sld xmlns:a="http://schemas.openxmlformats.org/drawingml/2006/main" xmlns:r="http://schemas.openxmlformats.org/officeDocument/2006/relationships" xmlns:p="http://schemas.openxmlformats.org/presentationml/2006/main">
   <p:cSld>
     <p:bg>
       <p:bgPr>
@@ -3112,7 +3635,14 @@
         <p:cNvGrpSpPr/>
         <p:nvPr/>
       </p:nvGrpSpPr>
-      <p:grpSpPr/>
+      <p:grpSpPr>
+        <a:xfrm>
+          <a:off x="0" y="0"/>
+          <a:ext cx="0" cy="0"/>
+          <a:chOff x="0" y="0"/>
+          <a:chExt cx="0" cy="0"/>
+        </a:xfrm>
+      </p:grpSpPr>
       <p:sp>
         <p:nvSpPr>
           <p:cNvPr id="2" name="Rectangle 1"/>
@@ -3153,6 +3683,7 @@
           <a:lstStyle/>
           <a:p>
             <a:pPr algn="ctr"/>
+            <a:endParaRPr/>
           </a:p>
         </p:txBody>
       </p:sp>
@@ -3187,6 +3718,7 @@
               </a:defRPr>
             </a:pPr>
             <a:r>
+              <a:rPr dirty="0"/>
               <a:t>WorldWithWeb</a:t>
             </a:r>
           </a:p>
@@ -3237,7 +3769,7 @@
         <p:spPr>
           <a:xfrm>
             <a:off x="1371600" y="4572000"/>
-            <a:ext cx="9418320" cy="914400"/>
+            <a:ext cx="9418320" cy="430887"/>
           </a:xfrm>
           <a:prstGeom prst="rect">
             <a:avLst/>
@@ -3259,7 +3791,16 @@
               </a:defRPr>
             </a:pPr>
             <a:r>
-              <a:t>Demo Session  |  Classes 8th - 10th</a:t>
+              <a:rPr dirty="0"/>
+              <a:t>Demo Session  |  Classes 8th - 1</a:t>
+            </a:r>
+            <a:r>
+              <a:rPr lang="en-IN" dirty="0"/>
+              <a:t>2</a:t>
+            </a:r>
+            <a:r>
+              <a:rPr dirty="0"/>
+              <a:t>th</a:t>
             </a:r>
           </a:p>
         </p:txBody>
@@ -3273,7 +3814,7 @@
 </file>
 
 <file path=ppt/slides/slide10.xml><?xml version="1.0" encoding="utf-8"?>
-<p:sld xmlns:a="http://schemas.openxmlformats.org/drawingml/2006/main" xmlns:p="http://schemas.openxmlformats.org/presentationml/2006/main" xmlns:r="http://schemas.openxmlformats.org/officeDocument/2006/relationships">
+<p:sld xmlns:a="http://schemas.openxmlformats.org/drawingml/2006/main" xmlns:r="http://schemas.openxmlformats.org/officeDocument/2006/relationships" xmlns:p="http://schemas.openxmlformats.org/presentationml/2006/main">
   <p:cSld>
     <p:bg>
       <p:bgPr>
@@ -3289,7 +3830,14 @@
         <p:cNvGrpSpPr/>
         <p:nvPr/>
       </p:nvGrpSpPr>
-      <p:grpSpPr/>
+      <p:grpSpPr>
+        <a:xfrm>
+          <a:off x="0" y="0"/>
+          <a:ext cx="0" cy="0"/>
+          <a:chOff x="0" y="0"/>
+          <a:chExt cx="0" cy="0"/>
+        </a:xfrm>
+      </p:grpSpPr>
       <p:sp>
         <p:nvSpPr>
           <p:cNvPr id="2" name="TextBox 1"/>
@@ -3368,6 +3916,7 @@
           <a:lstStyle/>
           <a:p>
             <a:pPr algn="ctr"/>
+            <a:endParaRPr/>
           </a:p>
         </p:txBody>
       </p:sp>
@@ -3433,6 +3982,7 @@
                 <a:latin typeface="Calibri"/>
               </a:defRPr>
             </a:pPr>
+            <a:endParaRPr/>
           </a:p>
           <a:p>
             <a:pPr algn="l">
@@ -3462,6 +4012,7 @@
                 <a:latin typeface="Calibri"/>
               </a:defRPr>
             </a:pPr>
+            <a:endParaRPr/>
           </a:p>
           <a:p>
             <a:pPr algn="l">
@@ -3539,6 +4090,7 @@
           <a:lstStyle/>
           <a:p>
             <a:pPr algn="ctr"/>
+            <a:endParaRPr/>
           </a:p>
         </p:txBody>
       </p:sp>
@@ -3604,6 +4156,7 @@
                 <a:latin typeface="Calibri"/>
               </a:defRPr>
             </a:pPr>
+            <a:endParaRPr/>
           </a:p>
           <a:p>
             <a:pPr algn="l">
@@ -3649,6 +4202,7 @@
                 <a:latin typeface="Calibri"/>
               </a:defRPr>
             </a:pPr>
+            <a:endParaRPr/>
           </a:p>
           <a:p>
             <a:pPr algn="l">
@@ -3726,6 +4280,7 @@
           <a:lstStyle/>
           <a:p>
             <a:pPr algn="ctr"/>
+            <a:endParaRPr/>
           </a:p>
         </p:txBody>
       </p:sp>
@@ -3791,6 +4346,7 @@
                 <a:latin typeface="Calibri"/>
               </a:defRPr>
             </a:pPr>
+            <a:endParaRPr/>
           </a:p>
           <a:p>
             <a:pPr algn="l">
@@ -3836,6 +4392,7 @@
                 <a:latin typeface="Calibri"/>
               </a:defRPr>
             </a:pPr>
+            <a:endParaRPr/>
           </a:p>
           <a:p>
             <a:pPr algn="l">
@@ -3916,7 +4473,7 @@
 </file>
 
 <file path=ppt/slides/slide11.xml><?xml version="1.0" encoding="utf-8"?>
-<p:sld xmlns:a="http://schemas.openxmlformats.org/drawingml/2006/main" xmlns:p="http://schemas.openxmlformats.org/presentationml/2006/main" xmlns:r="http://schemas.openxmlformats.org/officeDocument/2006/relationships">
+<p:sld xmlns:a="http://schemas.openxmlformats.org/drawingml/2006/main" xmlns:r="http://schemas.openxmlformats.org/officeDocument/2006/relationships" xmlns:p="http://schemas.openxmlformats.org/presentationml/2006/main">
   <p:cSld>
     <p:bg>
       <p:bgPr>
@@ -3932,7 +4489,14 @@
         <p:cNvGrpSpPr/>
         <p:nvPr/>
       </p:nvGrpSpPr>
-      <p:grpSpPr/>
+      <p:grpSpPr>
+        <a:xfrm>
+          <a:off x="0" y="0"/>
+          <a:ext cx="0" cy="0"/>
+          <a:chOff x="0" y="0"/>
+          <a:chExt cx="0" cy="0"/>
+        </a:xfrm>
+      </p:grpSpPr>
       <p:sp>
         <p:nvSpPr>
           <p:cNvPr id="2" name="TextBox 1"/>
@@ -4063,6 +4627,7 @@
                 <a:latin typeface="Calibri"/>
               </a:defRPr>
             </a:pPr>
+            <a:endParaRPr/>
           </a:p>
           <a:p>
             <a:pPr algn="l">
@@ -4108,6 +4673,7 @@
                 <a:latin typeface="Calibri"/>
               </a:defRPr>
             </a:pPr>
+            <a:endParaRPr/>
           </a:p>
           <a:p>
             <a:pPr algn="l">
@@ -4136,7 +4702,7 @@
 </file>
 
 <file path=ppt/slides/slide12.xml><?xml version="1.0" encoding="utf-8"?>
-<p:sld xmlns:a="http://schemas.openxmlformats.org/drawingml/2006/main" xmlns:p="http://schemas.openxmlformats.org/presentationml/2006/main" xmlns:r="http://schemas.openxmlformats.org/officeDocument/2006/relationships">
+<p:sld xmlns:a="http://schemas.openxmlformats.org/drawingml/2006/main" xmlns:r="http://schemas.openxmlformats.org/officeDocument/2006/relationships" xmlns:p="http://schemas.openxmlformats.org/presentationml/2006/main">
   <p:cSld>
     <p:bg>
       <p:bgPr>
@@ -4152,7 +4718,14 @@
         <p:cNvGrpSpPr/>
         <p:nvPr/>
       </p:nvGrpSpPr>
-      <p:grpSpPr/>
+      <p:grpSpPr>
+        <a:xfrm>
+          <a:off x="0" y="0"/>
+          <a:ext cx="0" cy="0"/>
+          <a:chOff x="0" y="0"/>
+          <a:chExt cx="0" cy="0"/>
+        </a:xfrm>
+      </p:grpSpPr>
       <p:sp>
         <p:nvSpPr>
           <p:cNvPr id="2" name="TextBox 1"/>
@@ -4231,6 +4804,7 @@
           <a:lstStyle/>
           <a:p>
             <a:pPr algn="ctr"/>
+            <a:endParaRPr/>
           </a:p>
         </p:txBody>
       </p:sp>
@@ -4352,6 +4926,7 @@
           <a:lstStyle/>
           <a:p>
             <a:pPr algn="ctr"/>
+            <a:endParaRPr/>
           </a:p>
         </p:txBody>
       </p:sp>
@@ -4473,6 +5048,7 @@
           <a:lstStyle/>
           <a:p>
             <a:pPr algn="ctr"/>
+            <a:endParaRPr/>
           </a:p>
         </p:txBody>
       </p:sp>
@@ -4594,6 +5170,7 @@
           <a:lstStyle/>
           <a:p>
             <a:pPr algn="ctr"/>
+            <a:endParaRPr/>
           </a:p>
         </p:txBody>
       </p:sp>
@@ -4682,7 +5259,7 @@
 </file>
 
 <file path=ppt/slides/slide13.xml><?xml version="1.0" encoding="utf-8"?>
-<p:sld xmlns:a="http://schemas.openxmlformats.org/drawingml/2006/main" xmlns:p="http://schemas.openxmlformats.org/presentationml/2006/main" xmlns:r="http://schemas.openxmlformats.org/officeDocument/2006/relationships">
+<p:sld xmlns:a="http://schemas.openxmlformats.org/drawingml/2006/main" xmlns:r="http://schemas.openxmlformats.org/officeDocument/2006/relationships" xmlns:p="http://schemas.openxmlformats.org/presentationml/2006/main">
   <p:cSld>
     <p:bg>
       <p:bgPr>
@@ -4698,7 +5275,14 @@
         <p:cNvGrpSpPr/>
         <p:nvPr/>
       </p:nvGrpSpPr>
-      <p:grpSpPr/>
+      <p:grpSpPr>
+        <a:xfrm>
+          <a:off x="0" y="0"/>
+          <a:ext cx="0" cy="0"/>
+          <a:chOff x="0" y="0"/>
+          <a:chExt cx="0" cy="0"/>
+        </a:xfrm>
+      </p:grpSpPr>
       <p:sp>
         <p:nvSpPr>
           <p:cNvPr id="2" name="TextBox 1"/>
@@ -4744,7 +5328,7 @@
         <p:spPr>
           <a:xfrm>
             <a:off x="1371600" y="1371600"/>
-            <a:ext cx="9418320" cy="914400"/>
+            <a:ext cx="9418320" cy="830997"/>
           </a:xfrm>
           <a:prstGeom prst="rect">
             <a:avLst/>
@@ -4766,10 +5350,26 @@
               </a:defRPr>
             </a:pPr>
             <a:r>
-              <a:t>In 8th-10th grade, nobody expects you to have one.</a:t>
-            </a:r>
-            <a:br/>
-            <a:r>
+              <a:rPr dirty="0"/>
+              <a:t>In 8th-1</a:t>
+            </a:r>
+            <a:r>
+              <a:rPr lang="en-IN" dirty="0"/>
+              <a:t>2</a:t>
+            </a:r>
+            <a:r>
+              <a:rPr dirty="0" err="1"/>
+              <a:t>th</a:t>
+            </a:r>
+            <a:r>
+              <a:rPr dirty="0"/>
+              <a:t> grade, nobody expects you to have one.</a:t>
+            </a:r>
+            <a:br>
+              <a:rPr dirty="0"/>
+            </a:br>
+            <a:r>
+              <a:rPr dirty="0"/>
               <a:t>That's exactly why having one is powerful.</a:t>
             </a:r>
           </a:p>
@@ -4817,6 +5417,7 @@
           <a:lstStyle/>
           <a:p>
             <a:pPr algn="ctr"/>
+            <a:endParaRPr/>
           </a:p>
         </p:txBody>
       </p:sp>
@@ -4866,6 +5467,7 @@
                 <a:latin typeface="Calibri"/>
               </a:defRPr>
             </a:pPr>
+            <a:endParaRPr/>
           </a:p>
           <a:p>
             <a:pPr algn="l">
@@ -4895,6 +5497,7 @@
                 <a:latin typeface="Calibri"/>
               </a:defRPr>
             </a:pPr>
+            <a:endParaRPr/>
           </a:p>
           <a:p>
             <a:pPr algn="l">
@@ -4972,6 +5575,7 @@
           <a:lstStyle/>
           <a:p>
             <a:pPr algn="ctr"/>
+            <a:endParaRPr/>
           </a:p>
         </p:txBody>
       </p:sp>
@@ -5021,6 +5625,7 @@
                 <a:latin typeface="Calibri"/>
               </a:defRPr>
             </a:pPr>
+            <a:endParaRPr/>
           </a:p>
           <a:p>
             <a:pPr algn="l">
@@ -5066,6 +5671,7 @@
                 <a:latin typeface="Calibri"/>
               </a:defRPr>
             </a:pPr>
+            <a:endParaRPr/>
           </a:p>
           <a:p>
             <a:pPr algn="l">
@@ -5094,7 +5700,7 @@
 </file>
 
 <file path=ppt/slides/slide14.xml><?xml version="1.0" encoding="utf-8"?>
-<p:sld xmlns:a="http://schemas.openxmlformats.org/drawingml/2006/main" xmlns:p="http://schemas.openxmlformats.org/presentationml/2006/main" xmlns:r="http://schemas.openxmlformats.org/officeDocument/2006/relationships">
+<p:sld xmlns:a="http://schemas.openxmlformats.org/drawingml/2006/main" xmlns:r="http://schemas.openxmlformats.org/officeDocument/2006/relationships" xmlns:p="http://schemas.openxmlformats.org/presentationml/2006/main">
   <p:cSld>
     <p:bg>
       <p:bgPr>
@@ -5110,7 +5716,14 @@
         <p:cNvGrpSpPr/>
         <p:nvPr/>
       </p:nvGrpSpPr>
-      <p:grpSpPr/>
+      <p:grpSpPr>
+        <a:xfrm>
+          <a:off x="0" y="0"/>
+          <a:ext cx="0" cy="0"/>
+          <a:chOff x="0" y="0"/>
+          <a:chExt cx="0" cy="0"/>
+        </a:xfrm>
+      </p:grpSpPr>
       <p:sp>
         <p:nvSpPr>
           <p:cNvPr id="2" name="TextBox 1"/>
@@ -5225,6 +5838,7 @@
           <a:lstStyle/>
           <a:p>
             <a:pPr algn="ctr"/>
+            <a:endParaRPr/>
           </a:p>
         </p:txBody>
       </p:sp>
@@ -5290,6 +5904,7 @@
                 <a:latin typeface="Calibri"/>
               </a:defRPr>
             </a:pPr>
+            <a:endParaRPr/>
           </a:p>
           <a:p>
             <a:pPr algn="l">
@@ -5351,6 +5966,7 @@
                 <a:latin typeface="Calibri"/>
               </a:defRPr>
             </a:pPr>
+            <a:endParaRPr/>
           </a:p>
           <a:p>
             <a:pPr algn="l">
@@ -5396,6 +6012,7 @@
                 <a:latin typeface="Calibri"/>
               </a:defRPr>
             </a:pPr>
+            <a:endParaRPr/>
           </a:p>
           <a:p>
             <a:pPr algn="l">
@@ -5473,6 +6090,7 @@
           <a:lstStyle/>
           <a:p>
             <a:pPr algn="ctr"/>
+            <a:endParaRPr/>
           </a:p>
         </p:txBody>
       </p:sp>
@@ -5538,6 +6156,7 @@
                 <a:latin typeface="Calibri"/>
               </a:defRPr>
             </a:pPr>
+            <a:endParaRPr/>
           </a:p>
           <a:p>
             <a:pPr algn="l">
@@ -5599,6 +6218,7 @@
                 <a:latin typeface="Calibri"/>
               </a:defRPr>
             </a:pPr>
+            <a:endParaRPr/>
           </a:p>
           <a:p>
             <a:pPr algn="l">
@@ -5644,6 +6264,7 @@
                 <a:latin typeface="Calibri"/>
               </a:defRPr>
             </a:pPr>
+            <a:endParaRPr/>
           </a:p>
           <a:p>
             <a:pPr algn="l">
@@ -5721,6 +6342,7 @@
           <a:lstStyle/>
           <a:p>
             <a:pPr algn="ctr"/>
+            <a:endParaRPr/>
           </a:p>
         </p:txBody>
       </p:sp>
@@ -5786,6 +6408,7 @@
                 <a:latin typeface="Calibri"/>
               </a:defRPr>
             </a:pPr>
+            <a:endParaRPr/>
           </a:p>
           <a:p>
             <a:pPr algn="l">
@@ -5847,6 +6470,7 @@
                 <a:latin typeface="Calibri"/>
               </a:defRPr>
             </a:pPr>
+            <a:endParaRPr/>
           </a:p>
           <a:p>
             <a:pPr algn="l">
@@ -5892,6 +6516,7 @@
                 <a:latin typeface="Calibri"/>
               </a:defRPr>
             </a:pPr>
+            <a:endParaRPr/>
           </a:p>
           <a:p>
             <a:pPr algn="l">
@@ -5936,7 +6561,7 @@
 </file>
 
 <file path=ppt/slides/slide15.xml><?xml version="1.0" encoding="utf-8"?>
-<p:sld xmlns:a="http://schemas.openxmlformats.org/drawingml/2006/main" xmlns:p="http://schemas.openxmlformats.org/presentationml/2006/main" xmlns:r="http://schemas.openxmlformats.org/officeDocument/2006/relationships">
+<p:sld xmlns:a="http://schemas.openxmlformats.org/drawingml/2006/main" xmlns:r="http://schemas.openxmlformats.org/officeDocument/2006/relationships" xmlns:p="http://schemas.openxmlformats.org/presentationml/2006/main">
   <p:cSld>
     <p:bg>
       <p:bgPr>
@@ -5952,7 +6577,14 @@
         <p:cNvGrpSpPr/>
         <p:nvPr/>
       </p:nvGrpSpPr>
-      <p:grpSpPr/>
+      <p:grpSpPr>
+        <a:xfrm>
+          <a:off x="0" y="0"/>
+          <a:ext cx="0" cy="0"/>
+          <a:chOff x="0" y="0"/>
+          <a:chExt cx="0" cy="0"/>
+        </a:xfrm>
+      </p:grpSpPr>
       <p:sp>
         <p:nvSpPr>
           <p:cNvPr id="2" name="TextBox 1"/>
@@ -6031,6 +6663,7 @@
           <a:lstStyle/>
           <a:p>
             <a:pPr algn="ctr"/>
+            <a:endParaRPr/>
           </a:p>
         </p:txBody>
       </p:sp>
@@ -6043,7 +6676,7 @@
         <p:spPr>
           <a:xfrm>
             <a:off x="1828800" y="2468880"/>
-            <a:ext cx="8503920" cy="1097280"/>
+            <a:ext cx="8503920" cy="830997"/>
           </a:xfrm>
           <a:prstGeom prst="rect">
             <a:avLst/>
@@ -6065,7 +6698,16 @@
               </a:defRPr>
             </a:pPr>
             <a:r>
-              <a:t>Without foundation      --&gt;      Use AI blindly      --&gt;      You're replaceable</a:t>
+              <a:rPr dirty="0"/>
+              <a:t>Without foundation--&gt;Use AI blindly--&gt;</a:t>
+            </a:r>
+            <a:r>
+              <a:rPr lang="en-IN" dirty="0"/>
+              <a:t>       </a:t>
+            </a:r>
+            <a:r>
+              <a:rPr dirty="0"/>
+              <a:t>You're replaceable</a:t>
             </a:r>
           </a:p>
         </p:txBody>
@@ -6112,6 +6754,7 @@
           <a:lstStyle/>
           <a:p>
             <a:pPr algn="ctr"/>
+            <a:endParaRPr/>
           </a:p>
         </p:txBody>
       </p:sp>
@@ -6124,7 +6767,7 @@
         <p:spPr>
           <a:xfrm>
             <a:off x="1828800" y="4297680"/>
-            <a:ext cx="8503920" cy="1097280"/>
+            <a:ext cx="8503920" cy="830997"/>
           </a:xfrm>
           <a:prstGeom prst="rect">
             <a:avLst/>
@@ -6146,7 +6789,16 @@
               </a:defRPr>
             </a:pPr>
             <a:r>
-              <a:t>With foundation         --&gt;      Direct AI           --&gt;      You're invaluable</a:t>
+              <a:rPr dirty="0"/>
+              <a:t>With foundation--&gt;Direct AI--&gt;</a:t>
+            </a:r>
+            <a:r>
+              <a:rPr lang="en-IN" dirty="0"/>
+              <a:t>              </a:t>
+            </a:r>
+            <a:r>
+              <a:rPr dirty="0"/>
+              <a:t>You're invaluable</a:t>
             </a:r>
           </a:p>
         </p:txBody>
@@ -6160,7 +6812,7 @@
 </file>
 
 <file path=ppt/slides/slide16.xml><?xml version="1.0" encoding="utf-8"?>
-<p:sld xmlns:a="http://schemas.openxmlformats.org/drawingml/2006/main" xmlns:p="http://schemas.openxmlformats.org/presentationml/2006/main" xmlns:r="http://schemas.openxmlformats.org/officeDocument/2006/relationships">
+<p:sld xmlns:a="http://schemas.openxmlformats.org/drawingml/2006/main" xmlns:r="http://schemas.openxmlformats.org/officeDocument/2006/relationships" xmlns:p="http://schemas.openxmlformats.org/presentationml/2006/main">
   <p:cSld>
     <p:bg>
       <p:bgPr>
@@ -6176,7 +6828,14 @@
         <p:cNvGrpSpPr/>
         <p:nvPr/>
       </p:nvGrpSpPr>
-      <p:grpSpPr/>
+      <p:grpSpPr>
+        <a:xfrm>
+          <a:off x="0" y="0"/>
+          <a:ext cx="0" cy="0"/>
+          <a:chOff x="0" y="0"/>
+          <a:chExt cx="0" cy="0"/>
+        </a:xfrm>
+      </p:grpSpPr>
       <p:sp>
         <p:nvSpPr>
           <p:cNvPr id="2" name="TextBox 1"/>
@@ -6262,7 +6921,7 @@
         <p:spPr>
           <a:xfrm>
             <a:off x="1371600" y="5486400"/>
-            <a:ext cx="9418320" cy="731520"/>
+            <a:ext cx="9418320" cy="400110"/>
           </a:xfrm>
           <a:prstGeom prst="rect">
             <a:avLst/>
@@ -6284,7 +6943,16 @@
               </a:defRPr>
             </a:pPr>
             <a:r>
-              <a:t>[ Open discussion -- let students share ideas ]</a:t>
+              <a:rPr dirty="0"/>
+              <a:t>[ Open discussion</a:t>
+            </a:r>
+            <a:r>
+              <a:rPr lang="en-IN" dirty="0"/>
+              <a:t> </a:t>
+            </a:r>
+            <a:r>
+              <a:rPr dirty="0"/>
+              <a:t>]</a:t>
             </a:r>
           </a:p>
         </p:txBody>
@@ -6298,7 +6966,7 @@
 </file>
 
 <file path=ppt/slides/slide17.xml><?xml version="1.0" encoding="utf-8"?>
-<p:sld xmlns:a="http://schemas.openxmlformats.org/drawingml/2006/main" xmlns:p="http://schemas.openxmlformats.org/presentationml/2006/main" xmlns:r="http://schemas.openxmlformats.org/officeDocument/2006/relationships">
+<p:sld xmlns:a="http://schemas.openxmlformats.org/drawingml/2006/main" xmlns:r="http://schemas.openxmlformats.org/officeDocument/2006/relationships" xmlns:p="http://schemas.openxmlformats.org/presentationml/2006/main">
   <p:cSld>
     <p:bg>
       <p:bgPr>
@@ -6314,7 +6982,14 @@
         <p:cNvGrpSpPr/>
         <p:nvPr/>
       </p:nvGrpSpPr>
-      <p:grpSpPr/>
+      <p:grpSpPr>
+        <a:xfrm>
+          <a:off x="0" y="0"/>
+          <a:ext cx="0" cy="0"/>
+          <a:chOff x="0" y="0"/>
+          <a:chExt cx="0" cy="0"/>
+        </a:xfrm>
+      </p:grpSpPr>
       <p:sp>
         <p:nvSpPr>
           <p:cNvPr id="2" name="TextBox 1"/>
@@ -6393,6 +7068,7 @@
           <a:lstStyle/>
           <a:p>
             <a:pPr algn="ctr"/>
+            <a:endParaRPr/>
           </a:p>
         </p:txBody>
       </p:sp>
@@ -6510,6 +7186,7 @@
           <a:lstStyle/>
           <a:p>
             <a:pPr algn="ctr"/>
+            <a:endParaRPr/>
           </a:p>
         </p:txBody>
       </p:sp>
@@ -6627,6 +7304,7 @@
           <a:lstStyle/>
           <a:p>
             <a:pPr algn="ctr"/>
+            <a:endParaRPr/>
           </a:p>
         </p:txBody>
       </p:sp>
@@ -6744,6 +7422,7 @@
           <a:lstStyle/>
           <a:p>
             <a:pPr algn="ctr"/>
+            <a:endParaRPr/>
           </a:p>
         </p:txBody>
       </p:sp>
@@ -6828,7 +7507,7 @@
 </file>
 
 <file path=ppt/slides/slide18.xml><?xml version="1.0" encoding="utf-8"?>
-<p:sld xmlns:a="http://schemas.openxmlformats.org/drawingml/2006/main" xmlns:p="http://schemas.openxmlformats.org/presentationml/2006/main" xmlns:r="http://schemas.openxmlformats.org/officeDocument/2006/relationships">
+<p:sld xmlns:a="http://schemas.openxmlformats.org/drawingml/2006/main" xmlns:r="http://schemas.openxmlformats.org/officeDocument/2006/relationships" xmlns:p="http://schemas.openxmlformats.org/presentationml/2006/main">
   <p:cSld>
     <p:bg>
       <p:bgPr>
@@ -6844,7 +7523,14 @@
         <p:cNvGrpSpPr/>
         <p:nvPr/>
       </p:nvGrpSpPr>
-      <p:grpSpPr/>
+      <p:grpSpPr>
+        <a:xfrm>
+          <a:off x="0" y="0"/>
+          <a:ext cx="0" cy="0"/>
+          <a:chOff x="0" y="0"/>
+          <a:chExt cx="0" cy="0"/>
+        </a:xfrm>
+      </p:grpSpPr>
       <p:sp>
         <p:nvSpPr>
           <p:cNvPr id="2" name="Rectangle 1"/>
@@ -6885,6 +7571,7 @@
           <a:lstStyle/>
           <a:p>
             <a:pPr algn="ctr"/>
+            <a:endParaRPr/>
           </a:p>
         </p:txBody>
       </p:sp>
@@ -7006,6 +7693,7 @@
                 <a:latin typeface="Calibri"/>
               </a:defRPr>
             </a:pPr>
+            <a:endParaRPr/>
           </a:p>
           <a:p>
             <a:pPr algn="ctr">
@@ -7034,7 +7722,7 @@
 </file>
 
 <file path=ppt/slides/slide2.xml><?xml version="1.0" encoding="utf-8"?>
-<p:sld xmlns:a="http://schemas.openxmlformats.org/drawingml/2006/main" xmlns:p="http://schemas.openxmlformats.org/presentationml/2006/main" xmlns:r="http://schemas.openxmlformats.org/officeDocument/2006/relationships">
+<p:sld xmlns:a="http://schemas.openxmlformats.org/drawingml/2006/main" xmlns:r="http://schemas.openxmlformats.org/officeDocument/2006/relationships" xmlns:p="http://schemas.openxmlformats.org/presentationml/2006/main">
   <p:cSld>
     <p:bg>
       <p:bgPr>
@@ -7050,7 +7738,14 @@
         <p:cNvGrpSpPr/>
         <p:nvPr/>
       </p:nvGrpSpPr>
-      <p:grpSpPr/>
+      <p:grpSpPr>
+        <a:xfrm>
+          <a:off x="0" y="0"/>
+          <a:ext cx="0" cy="0"/>
+          <a:chOff x="0" y="0"/>
+          <a:chExt cx="0" cy="0"/>
+        </a:xfrm>
+      </p:grpSpPr>
       <p:sp>
         <p:nvSpPr>
           <p:cNvPr id="2" name="TextBox 1"/>
@@ -7168,7 +7863,7 @@
 </file>
 
 <file path=ppt/slides/slide3.xml><?xml version="1.0" encoding="utf-8"?>
-<p:sld xmlns:a="http://schemas.openxmlformats.org/drawingml/2006/main" xmlns:p="http://schemas.openxmlformats.org/presentationml/2006/main" xmlns:r="http://schemas.openxmlformats.org/officeDocument/2006/relationships">
+<p:sld xmlns:a="http://schemas.openxmlformats.org/drawingml/2006/main" xmlns:r="http://schemas.openxmlformats.org/officeDocument/2006/relationships" xmlns:p="http://schemas.openxmlformats.org/presentationml/2006/main">
   <p:cSld>
     <p:bg>
       <p:bgPr>
@@ -7184,7 +7879,14 @@
         <p:cNvGrpSpPr/>
         <p:nvPr/>
       </p:nvGrpSpPr>
-      <p:grpSpPr/>
+      <p:grpSpPr>
+        <a:xfrm>
+          <a:off x="0" y="0"/>
+          <a:ext cx="0" cy="0"/>
+          <a:chOff x="0" y="0"/>
+          <a:chExt cx="0" cy="0"/>
+        </a:xfrm>
+      </p:grpSpPr>
       <p:sp>
         <p:nvSpPr>
           <p:cNvPr id="2" name="TextBox 1"/>
@@ -7299,6 +8001,7 @@
           <a:lstStyle/>
           <a:p>
             <a:pPr algn="ctr"/>
+            <a:endParaRPr/>
           </a:p>
         </p:txBody>
       </p:sp>
@@ -7380,6 +8083,7 @@
           <a:lstStyle/>
           <a:p>
             <a:pPr algn="ctr"/>
+            <a:endParaRPr/>
           </a:p>
         </p:txBody>
       </p:sp>
@@ -7428,7 +8132,7 @@
 </file>
 
 <file path=ppt/slides/slide4.xml><?xml version="1.0" encoding="utf-8"?>
-<p:sld xmlns:a="http://schemas.openxmlformats.org/drawingml/2006/main" xmlns:p="http://schemas.openxmlformats.org/presentationml/2006/main" xmlns:r="http://schemas.openxmlformats.org/officeDocument/2006/relationships">
+<p:sld xmlns:a="http://schemas.openxmlformats.org/drawingml/2006/main" xmlns:r="http://schemas.openxmlformats.org/officeDocument/2006/relationships" xmlns:p="http://schemas.openxmlformats.org/presentationml/2006/main">
   <p:cSld>
     <p:bg>
       <p:bgPr>
@@ -7444,7 +8148,14 @@
         <p:cNvGrpSpPr/>
         <p:nvPr/>
       </p:nvGrpSpPr>
-      <p:grpSpPr/>
+      <p:grpSpPr>
+        <a:xfrm>
+          <a:off x="0" y="0"/>
+          <a:ext cx="0" cy="0"/>
+          <a:chOff x="0" y="0"/>
+          <a:chExt cx="0" cy="0"/>
+        </a:xfrm>
+      </p:grpSpPr>
       <p:sp>
         <p:nvSpPr>
           <p:cNvPr id="2" name="TextBox 1"/>
@@ -7454,7 +8165,7 @@
         <p:spPr>
           <a:xfrm>
             <a:off x="1371600" y="1828800"/>
-            <a:ext cx="9418320" cy="1828800"/>
+            <a:ext cx="9418320" cy="830997"/>
           </a:xfrm>
           <a:prstGeom prst="rect">
             <a:avLst/>
@@ -7476,7 +8187,16 @@
               </a:defRPr>
             </a:pPr>
             <a:r>
-              <a:t>Let me show you what I built.</a:t>
+              <a:rPr dirty="0"/>
+              <a:t>Let me show you what </a:t>
+            </a:r>
+            <a:r>
+              <a:rPr lang="en-IN" dirty="0"/>
+              <a:t>we</a:t>
+            </a:r>
+            <a:r>
+              <a:rPr dirty="0"/>
+              <a:t> built.</a:t>
             </a:r>
           </a:p>
         </p:txBody>
@@ -7562,7 +8282,7 @@
 </file>
 
 <file path=ppt/slides/slide5.xml><?xml version="1.0" encoding="utf-8"?>
-<p:sld xmlns:a="http://schemas.openxmlformats.org/drawingml/2006/main" xmlns:p="http://schemas.openxmlformats.org/presentationml/2006/main" xmlns:r="http://schemas.openxmlformats.org/officeDocument/2006/relationships">
+<p:sld xmlns:a="http://schemas.openxmlformats.org/drawingml/2006/main" xmlns:r="http://schemas.openxmlformats.org/officeDocument/2006/relationships" xmlns:p="http://schemas.openxmlformats.org/presentationml/2006/main">
   <p:cSld>
     <p:bg>
       <p:bgPr>
@@ -7578,7 +8298,14 @@
         <p:cNvGrpSpPr/>
         <p:nvPr/>
       </p:nvGrpSpPr>
-      <p:grpSpPr/>
+      <p:grpSpPr>
+        <a:xfrm>
+          <a:off x="0" y="0"/>
+          <a:ext cx="0" cy="0"/>
+          <a:chOff x="0" y="0"/>
+          <a:chExt cx="0" cy="0"/>
+        </a:xfrm>
+      </p:grpSpPr>
       <p:sp>
         <p:nvSpPr>
           <p:cNvPr id="2" name="Rectangle 1"/>
@@ -7619,6 +8346,7 @@
           <a:lstStyle/>
           <a:p>
             <a:pPr algn="ctr"/>
+            <a:endParaRPr/>
           </a:p>
         </p:txBody>
       </p:sp>
@@ -7827,7 +8555,7 @@
 </file>
 
 <file path=ppt/slides/slide6.xml><?xml version="1.0" encoding="utf-8"?>
-<p:sld xmlns:a="http://schemas.openxmlformats.org/drawingml/2006/main" xmlns:p="http://schemas.openxmlformats.org/presentationml/2006/main" xmlns:r="http://schemas.openxmlformats.org/officeDocument/2006/relationships">
+<p:sld xmlns:a="http://schemas.openxmlformats.org/drawingml/2006/main" xmlns:r="http://schemas.openxmlformats.org/officeDocument/2006/relationships" xmlns:p="http://schemas.openxmlformats.org/presentationml/2006/main">
   <p:cSld>
     <p:bg>
       <p:bgPr>
@@ -7843,7 +8571,14 @@
         <p:cNvGrpSpPr/>
         <p:nvPr/>
       </p:nvGrpSpPr>
-      <p:grpSpPr/>
+      <p:grpSpPr>
+        <a:xfrm>
+          <a:off x="0" y="0"/>
+          <a:ext cx="0" cy="0"/>
+          <a:chOff x="0" y="0"/>
+          <a:chExt cx="0" cy="0"/>
+        </a:xfrm>
+      </p:grpSpPr>
       <p:sp>
         <p:nvSpPr>
           <p:cNvPr id="2" name="Rectangle 1"/>
@@ -7884,6 +8619,7 @@
           <a:lstStyle/>
           <a:p>
             <a:pPr algn="ctr"/>
+            <a:endParaRPr/>
           </a:p>
         </p:txBody>
       </p:sp>
@@ -8037,6 +8773,7 @@
           <a:lstStyle/>
           <a:p>
             <a:pPr algn="ctr"/>
+            <a:endParaRPr/>
           </a:p>
         </p:txBody>
       </p:sp>
@@ -8150,6 +8887,7 @@
           <a:lstStyle/>
           <a:p>
             <a:pPr algn="ctr"/>
+            <a:endParaRPr/>
           </a:p>
         </p:txBody>
       </p:sp>
@@ -8184,6 +8922,7 @@
               </a:defRPr>
             </a:pPr>
             <a:r>
+              <a:rPr dirty="0"/>
               <a:t>Password: "X#9kL2$m"</a:t>
             </a:r>
           </a:p>
@@ -8200,6 +8939,7 @@
               </a:defRPr>
             </a:pPr>
             <a:r>
+              <a:rPr dirty="0"/>
               <a:t>Would take years to crack</a:t>
             </a:r>
           </a:p>
@@ -8216,6 +8956,7 @@
               </a:defRPr>
             </a:pPr>
             <a:r>
+              <a:rPr dirty="0"/>
               <a:t>This is why password strength matters.</a:t>
             </a:r>
           </a:p>
@@ -8230,7 +8971,7 @@
 </file>
 
 <file path=ppt/slides/slide7.xml><?xml version="1.0" encoding="utf-8"?>
-<p:sld xmlns:a="http://schemas.openxmlformats.org/drawingml/2006/main" xmlns:p="http://schemas.openxmlformats.org/presentationml/2006/main" xmlns:r="http://schemas.openxmlformats.org/officeDocument/2006/relationships">
+<p:sld xmlns:a="http://schemas.openxmlformats.org/drawingml/2006/main" xmlns:r="http://schemas.openxmlformats.org/officeDocument/2006/relationships" xmlns:p="http://schemas.openxmlformats.org/presentationml/2006/main">
   <p:cSld>
     <p:bg>
       <p:bgPr>
@@ -8246,7 +8987,14 @@
         <p:cNvGrpSpPr/>
         <p:nvPr/>
       </p:nvGrpSpPr>
-      <p:grpSpPr/>
+      <p:grpSpPr>
+        <a:xfrm>
+          <a:off x="0" y="0"/>
+          <a:ext cx="0" cy="0"/>
+          <a:chOff x="0" y="0"/>
+          <a:chExt cx="0" cy="0"/>
+        </a:xfrm>
+      </p:grpSpPr>
       <p:sp>
         <p:nvSpPr>
           <p:cNvPr id="2" name="Rectangle 1"/>
@@ -8287,6 +9035,7 @@
           <a:lstStyle/>
           <a:p>
             <a:pPr algn="ctr"/>
+            <a:endParaRPr/>
           </a:p>
         </p:txBody>
       </p:sp>
@@ -8507,7 +9256,7 @@
 </file>
 
 <file path=ppt/slides/slide8.xml><?xml version="1.0" encoding="utf-8"?>
-<p:sld xmlns:a="http://schemas.openxmlformats.org/drawingml/2006/main" xmlns:p="http://schemas.openxmlformats.org/presentationml/2006/main" xmlns:r="http://schemas.openxmlformats.org/officeDocument/2006/relationships">
+<p:sld xmlns:a="http://schemas.openxmlformats.org/drawingml/2006/main" xmlns:r="http://schemas.openxmlformats.org/officeDocument/2006/relationships" xmlns:p="http://schemas.openxmlformats.org/presentationml/2006/main">
   <p:cSld>
     <p:bg>
       <p:bgPr>
@@ -8523,7 +9272,14 @@
         <p:cNvGrpSpPr/>
         <p:nvPr/>
       </p:nvGrpSpPr>
-      <p:grpSpPr/>
+      <p:grpSpPr>
+        <a:xfrm>
+          <a:off x="0" y="0"/>
+          <a:ext cx="0" cy="0"/>
+          <a:chOff x="0" y="0"/>
+          <a:chExt cx="0" cy="0"/>
+        </a:xfrm>
+      </p:grpSpPr>
       <p:sp>
         <p:nvSpPr>
           <p:cNvPr id="2" name="Rectangle 1"/>
@@ -8564,6 +9320,7 @@
           <a:lstStyle/>
           <a:p>
             <a:pPr algn="ctr"/>
+            <a:endParaRPr/>
           </a:p>
         </p:txBody>
       </p:sp>
@@ -8681,6 +9438,7 @@
           <a:lstStyle/>
           <a:p>
             <a:pPr algn="ctr"/>
+            <a:endParaRPr/>
           </a:p>
         </p:txBody>
       </p:sp>
@@ -8746,6 +9504,7 @@
                 <a:latin typeface="Calibri"/>
               </a:defRPr>
             </a:pPr>
+            <a:endParaRPr/>
           </a:p>
           <a:p>
             <a:pPr algn="l">
@@ -8855,6 +9614,7 @@
           <a:lstStyle/>
           <a:p>
             <a:pPr algn="ctr"/>
+            <a:endParaRPr/>
           </a:p>
         </p:txBody>
       </p:sp>
@@ -8920,6 +9680,7 @@
                 <a:latin typeface="Calibri"/>
               </a:defRPr>
             </a:pPr>
+            <a:endParaRPr/>
           </a:p>
           <a:p>
             <a:pPr algn="l">
@@ -8980,7 +9741,7 @@
 </file>
 
 <file path=ppt/slides/slide9.xml><?xml version="1.0" encoding="utf-8"?>
-<p:sld xmlns:a="http://schemas.openxmlformats.org/drawingml/2006/main" xmlns:p="http://schemas.openxmlformats.org/presentationml/2006/main" xmlns:r="http://schemas.openxmlformats.org/officeDocument/2006/relationships">
+<p:sld xmlns:a="http://schemas.openxmlformats.org/drawingml/2006/main" xmlns:r="http://schemas.openxmlformats.org/officeDocument/2006/relationships" xmlns:p="http://schemas.openxmlformats.org/presentationml/2006/main">
   <p:cSld>
     <p:bg>
       <p:bgPr>
@@ -8996,7 +9757,14 @@
         <p:cNvGrpSpPr/>
         <p:nvPr/>
       </p:nvGrpSpPr>
-      <p:grpSpPr/>
+      <p:grpSpPr>
+        <a:xfrm>
+          <a:off x="0" y="0"/>
+          <a:ext cx="0" cy="0"/>
+          <a:chOff x="0" y="0"/>
+          <a:chExt cx="0" cy="0"/>
+        </a:xfrm>
+      </p:grpSpPr>
       <p:sp>
         <p:nvSpPr>
           <p:cNvPr id="2" name="TextBox 1"/>
@@ -9073,6 +9841,7 @@
           <a:lstStyle/>
           <a:p>
             <a:pPr algn="ctr"/>
+            <a:endParaRPr/>
           </a:p>
         </p:txBody>
       </p:sp>
@@ -9122,6 +9891,7 @@
                 <a:latin typeface="Calibri"/>
               </a:defRPr>
             </a:pPr>
+            <a:endParaRPr/>
           </a:p>
           <a:p>
             <a:pPr algn="l">
@@ -9539,4 +10309,319 @@
   </a:objectDefaults>
   <a:extraClrSchemeLst/>
 </a:theme>
+</file>
+
+<file path=ppt/theme/theme2.xml><?xml version="1.0" encoding="utf-8"?>
+<a:theme xmlns:a="http://schemas.openxmlformats.org/drawingml/2006/main" name="Office Theme">
+  <a:themeElements>
+    <a:clrScheme name="Office">
+      <a:dk1>
+        <a:sysClr val="windowText" lastClr="000000"/>
+      </a:dk1>
+      <a:lt1>
+        <a:sysClr val="window" lastClr="FFFFFF"/>
+      </a:lt1>
+      <a:dk2>
+        <a:srgbClr val="0E2841"/>
+      </a:dk2>
+      <a:lt2>
+        <a:srgbClr val="E8E8E8"/>
+      </a:lt2>
+      <a:accent1>
+        <a:srgbClr val="156082"/>
+      </a:accent1>
+      <a:accent2>
+        <a:srgbClr val="E97132"/>
+      </a:accent2>
+      <a:accent3>
+        <a:srgbClr val="196B24"/>
+      </a:accent3>
+      <a:accent4>
+        <a:srgbClr val="0F9ED5"/>
+      </a:accent4>
+      <a:accent5>
+        <a:srgbClr val="A02B93"/>
+      </a:accent5>
+      <a:accent6>
+        <a:srgbClr val="4EA72E"/>
+      </a:accent6>
+      <a:hlink>
+        <a:srgbClr val="467886"/>
+      </a:hlink>
+      <a:folHlink>
+        <a:srgbClr val="96607D"/>
+      </a:folHlink>
+    </a:clrScheme>
+    <a:fontScheme name="Office">
+      <a:majorFont>
+        <a:latin typeface="Aptos Display" panose="02110004020202020204"/>
+        <a:ea typeface=""/>
+        <a:cs typeface=""/>
+        <a:font script="Jpan" typeface="游ゴシック Light"/>
+        <a:font script="Hang" typeface="맑은 고딕"/>
+        <a:font script="Hans" typeface="等线 Light"/>
+        <a:font script="Hant" typeface="新細明體"/>
+        <a:font script="Arab" typeface="Times New Roman"/>
+        <a:font script="Hebr" typeface="Times New Roman"/>
+        <a:font script="Thai" typeface="Angsana New"/>
+        <a:font script="Ethi" typeface="Nyala"/>
+        <a:font script="Beng" typeface="Vrinda"/>
+        <a:font script="Gujr" typeface="Shruti"/>
+        <a:font script="Khmr" typeface="MoolBoran"/>
+        <a:font script="Knda" typeface="Tunga"/>
+        <a:font script="Guru" typeface="Raavi"/>
+        <a:font script="Cans" typeface="Euphemia"/>
+        <a:font script="Cher" typeface="Plantagenet Cherokee"/>
+        <a:font script="Yiii" typeface="Microsoft Yi Baiti"/>
+        <a:font script="Tibt" typeface="Microsoft Himalaya"/>
+        <a:font script="Thaa" typeface="MV Boli"/>
+        <a:font script="Deva" typeface="Mangal"/>
+        <a:font script="Telu" typeface="Gautami"/>
+        <a:font script="Taml" typeface="Latha"/>
+        <a:font script="Syrc" typeface="Estrangelo Edessa"/>
+        <a:font script="Orya" typeface="Kalinga"/>
+        <a:font script="Mlym" typeface="Kartika"/>
+        <a:font script="Laoo" typeface="DokChampa"/>
+        <a:font script="Sinh" typeface="Iskoola Pota"/>
+        <a:font script="Mong" typeface="Mongolian Baiti"/>
+        <a:font script="Viet" typeface="Times New Roman"/>
+        <a:font script="Uigh" typeface="Microsoft Uighur"/>
+        <a:font script="Geor" typeface="Sylfaen"/>
+        <a:font script="Armn" typeface="Arial"/>
+        <a:font script="Bugi" typeface="Leelawadee UI"/>
+        <a:font script="Bopo" typeface="Microsoft JhengHei"/>
+        <a:font script="Java" typeface="Javanese Text"/>
+        <a:font script="Lisu" typeface="Segoe UI"/>
+        <a:font script="Mymr" typeface="Myanmar Text"/>
+        <a:font script="Nkoo" typeface="Ebrima"/>
+        <a:font script="Olck" typeface="Nirmala UI"/>
+        <a:font script="Osma" typeface="Ebrima"/>
+        <a:font script="Phag" typeface="Phagspa"/>
+        <a:font script="Syrn" typeface="Estrangelo Edessa"/>
+        <a:font script="Syrj" typeface="Estrangelo Edessa"/>
+        <a:font script="Syre" typeface="Estrangelo Edessa"/>
+        <a:font script="Sora" typeface="Nirmala UI"/>
+        <a:font script="Tale" typeface="Microsoft Tai Le"/>
+        <a:font script="Talu" typeface="Microsoft New Tai Lue"/>
+        <a:font script="Tfng" typeface="Ebrima"/>
+      </a:majorFont>
+      <a:minorFont>
+        <a:latin typeface="Aptos" panose="02110004020202020204"/>
+        <a:ea typeface=""/>
+        <a:cs typeface=""/>
+        <a:font script="Jpan" typeface="游ゴシック"/>
+        <a:font script="Hang" typeface="맑은 고딕"/>
+        <a:font script="Hans" typeface="等线"/>
+        <a:font script="Hant" typeface="新細明體"/>
+        <a:font script="Arab" typeface="Arial"/>
+        <a:font script="Hebr" typeface="Arial"/>
+        <a:font script="Thai" typeface="Cordia New"/>
+        <a:font script="Ethi" typeface="Nyala"/>
+        <a:font script="Beng" typeface="Vrinda"/>
+        <a:font script="Gujr" typeface="Shruti"/>
+        <a:font script="Khmr" typeface="DaunPenh"/>
+        <a:font script="Knda" typeface="Tunga"/>
+        <a:font script="Guru" typeface="Raavi"/>
+        <a:font script="Cans" typeface="Euphemia"/>
+        <a:font script="Cher" typeface="Plantagenet Cherokee"/>
+        <a:font script="Yiii" typeface="Microsoft Yi Baiti"/>
+        <a:font script="Tibt" typeface="Microsoft Himalaya"/>
+        <a:font script="Thaa" typeface="MV Boli"/>
+        <a:font script="Deva" typeface="Mangal"/>
+        <a:font script="Telu" typeface="Gautami"/>
+        <a:font script="Taml" typeface="Latha"/>
+        <a:font script="Syrc" typeface="Estrangelo Edessa"/>
+        <a:font script="Orya" typeface="Kalinga"/>
+        <a:font script="Mlym" typeface="Kartika"/>
+        <a:font script="Laoo" typeface="DokChampa"/>
+        <a:font script="Sinh" typeface="Iskoola Pota"/>
+        <a:font script="Mong" typeface="Mongolian Baiti"/>
+        <a:font script="Viet" typeface="Arial"/>
+        <a:font script="Uigh" typeface="Microsoft Uighur"/>
+        <a:font script="Geor" typeface="Sylfaen"/>
+        <a:font script="Armn" typeface="Arial"/>
+        <a:font script="Bugi" typeface="Leelawadee UI"/>
+        <a:font script="Bopo" typeface="Microsoft JhengHei"/>
+        <a:font script="Java" typeface="Javanese Text"/>
+        <a:font script="Lisu" typeface="Segoe UI"/>
+        <a:font script="Mymr" typeface="Myanmar Text"/>
+        <a:font script="Nkoo" typeface="Ebrima"/>
+        <a:font script="Olck" typeface="Nirmala UI"/>
+        <a:font script="Osma" typeface="Ebrima"/>
+        <a:font script="Phag" typeface="Phagspa"/>
+        <a:font script="Syrn" typeface="Estrangelo Edessa"/>
+        <a:font script="Syrj" typeface="Estrangelo Edessa"/>
+        <a:font script="Syre" typeface="Estrangelo Edessa"/>
+        <a:font script="Sora" typeface="Nirmala UI"/>
+        <a:font script="Tale" typeface="Microsoft Tai Le"/>
+        <a:font script="Talu" typeface="Microsoft New Tai Lue"/>
+        <a:font script="Tfng" typeface="Ebrima"/>
+      </a:minorFont>
+    </a:fontScheme>
+    <a:fmtScheme name="Office">
+      <a:fillStyleLst>
+        <a:solidFill>
+          <a:schemeClr val="phClr"/>
+        </a:solidFill>
+        <a:gradFill rotWithShape="1">
+          <a:gsLst>
+            <a:gs pos="0">
+              <a:schemeClr val="phClr">
+                <a:lumMod val="110000"/>
+                <a:satMod val="105000"/>
+                <a:tint val="67000"/>
+              </a:schemeClr>
+            </a:gs>
+            <a:gs pos="50000">
+              <a:schemeClr val="phClr">
+                <a:lumMod val="105000"/>
+                <a:satMod val="103000"/>
+                <a:tint val="73000"/>
+              </a:schemeClr>
+            </a:gs>
+            <a:gs pos="100000">
+              <a:schemeClr val="phClr">
+                <a:lumMod val="105000"/>
+                <a:satMod val="109000"/>
+                <a:tint val="81000"/>
+              </a:schemeClr>
+            </a:gs>
+          </a:gsLst>
+          <a:lin ang="5400000" scaled="0"/>
+        </a:gradFill>
+        <a:gradFill rotWithShape="1">
+          <a:gsLst>
+            <a:gs pos="0">
+              <a:schemeClr val="phClr">
+                <a:satMod val="103000"/>
+                <a:lumMod val="102000"/>
+                <a:tint val="94000"/>
+              </a:schemeClr>
+            </a:gs>
+            <a:gs pos="50000">
+              <a:schemeClr val="phClr">
+                <a:satMod val="110000"/>
+                <a:lumMod val="100000"/>
+                <a:shade val="100000"/>
+              </a:schemeClr>
+            </a:gs>
+            <a:gs pos="100000">
+              <a:schemeClr val="phClr">
+                <a:lumMod val="99000"/>
+                <a:satMod val="120000"/>
+                <a:shade val="78000"/>
+              </a:schemeClr>
+            </a:gs>
+          </a:gsLst>
+          <a:lin ang="5400000" scaled="0"/>
+        </a:gradFill>
+      </a:fillStyleLst>
+      <a:lnStyleLst>
+        <a:ln w="12700" cap="flat" cmpd="sng" algn="ctr">
+          <a:solidFill>
+            <a:schemeClr val="phClr"/>
+          </a:solidFill>
+          <a:prstDash val="solid"/>
+          <a:miter lim="800000"/>
+        </a:ln>
+        <a:ln w="19050" cap="flat" cmpd="sng" algn="ctr">
+          <a:solidFill>
+            <a:schemeClr val="phClr"/>
+          </a:solidFill>
+          <a:prstDash val="solid"/>
+          <a:miter lim="800000"/>
+        </a:ln>
+        <a:ln w="25400" cap="flat" cmpd="sng" algn="ctr">
+          <a:solidFill>
+            <a:schemeClr val="phClr"/>
+          </a:solidFill>
+          <a:prstDash val="solid"/>
+          <a:miter lim="800000"/>
+        </a:ln>
+      </a:lnStyleLst>
+      <a:effectStyleLst>
+        <a:effectStyle>
+          <a:effectLst/>
+        </a:effectStyle>
+        <a:effectStyle>
+          <a:effectLst/>
+        </a:effectStyle>
+        <a:effectStyle>
+          <a:effectLst>
+            <a:outerShdw blurRad="57150" dist="19050" dir="5400000" algn="ctr" rotWithShape="0">
+              <a:srgbClr val="000000">
+                <a:alpha val="63000"/>
+              </a:srgbClr>
+            </a:outerShdw>
+          </a:effectLst>
+        </a:effectStyle>
+      </a:effectStyleLst>
+      <a:bgFillStyleLst>
+        <a:solidFill>
+          <a:schemeClr val="phClr"/>
+        </a:solidFill>
+        <a:solidFill>
+          <a:schemeClr val="phClr">
+            <a:tint val="95000"/>
+            <a:satMod val="170000"/>
+          </a:schemeClr>
+        </a:solidFill>
+        <a:gradFill rotWithShape="1">
+          <a:gsLst>
+            <a:gs pos="0">
+              <a:schemeClr val="phClr">
+                <a:tint val="93000"/>
+                <a:satMod val="150000"/>
+                <a:shade val="98000"/>
+                <a:lumMod val="102000"/>
+              </a:schemeClr>
+            </a:gs>
+            <a:gs pos="50000">
+              <a:schemeClr val="phClr">
+                <a:tint val="98000"/>
+                <a:satMod val="130000"/>
+                <a:shade val="90000"/>
+                <a:lumMod val="103000"/>
+              </a:schemeClr>
+            </a:gs>
+            <a:gs pos="100000">
+              <a:schemeClr val="phClr">
+                <a:shade val="63000"/>
+                <a:satMod val="120000"/>
+              </a:schemeClr>
+            </a:gs>
+          </a:gsLst>
+          <a:lin ang="5400000" scaled="0"/>
+        </a:gradFill>
+      </a:bgFillStyleLst>
+    </a:fmtScheme>
+  </a:themeElements>
+  <a:objectDefaults>
+    <a:lnDef>
+      <a:spPr/>
+      <a:bodyPr/>
+      <a:lstStyle/>
+      <a:style>
+        <a:lnRef idx="2">
+          <a:schemeClr val="accent1"/>
+        </a:lnRef>
+        <a:fillRef idx="0">
+          <a:schemeClr val="accent1"/>
+        </a:fillRef>
+        <a:effectRef idx="1">
+          <a:schemeClr val="accent1"/>
+        </a:effectRef>
+        <a:fontRef idx="minor">
+          <a:schemeClr val="tx1"/>
+        </a:fontRef>
+      </a:style>
+    </a:lnDef>
+  </a:objectDefaults>
+  <a:extraClrSchemeLst/>
+  <a:extLst>
+    <a:ext uri="{05A4C25C-085E-4340-85A3-A5531E510DB2}">
+      <thm15:themeFamily xmlns:thm15="http://schemas.microsoft.com/office/thememl/2012/main" name="Office Theme" id="{2E142A2C-CD16-42D6-873A-C26D2A0506FA}" vid="{1BDDFF52-6CD6-40A5-AB3C-68EB2F1E4D0A}"/>
+    </a:ext>
+  </a:extLst>
+</a:theme>
 </file>